--- a/ADG/16장/16장_역할전환과이후운영.pptx
+++ b/ADG/16장/16장_역할전환과이후운영.pptx
@@ -40,6 +40,16 @@
     <p:sldId id="288" r:id="rId40"/>
     <p:sldId id="289" r:id="rId41"/>
     <p:sldId id="290" r:id="rId42"/>
+    <p:sldId id="291" r:id="rId43"/>
+    <p:sldId id="292" r:id="rId44"/>
+    <p:sldId id="293" r:id="rId45"/>
+    <p:sldId id="294" r:id="rId46"/>
+    <p:sldId id="295" r:id="rId47"/>
+    <p:sldId id="296" r:id="rId48"/>
+    <p:sldId id="297" r:id="rId49"/>
+    <p:sldId id="298" r:id="rId50"/>
+    <p:sldId id="299" r:id="rId51"/>
+    <p:sldId id="300" r:id="rId52"/>
   </p:sldIdLst>
   <p:sldSz cx="12191695" cy="6858000" type="screen4x3"/>
   <p:notesSz cx="6858000" cy="9144000"/>
@@ -1611,6 +1621,426 @@
 </p:notes>
 </file>
 
+<file path=ppt/notesSlides/notesSlide24.xml><?xml version="1.0" encoding="utf-8"?>
+<p:notes xmlns:a="http://schemas.openxmlformats.org/drawingml/2006/main" xmlns:p="http://schemas.openxmlformats.org/presentationml/2006/main" xmlns:r="http://schemas.openxmlformats.org/officeDocument/2006/relationships">
+  <p:cSld>
+    <p:spTree>
+      <p:nvGrpSpPr>
+        <p:cNvPr id="1" name=""/>
+        <p:cNvGrpSpPr/>
+        <p:nvPr/>
+      </p:nvGrpSpPr>
+      <p:grpSpPr>
+        <a:xfrm>
+          <a:off x="0" y="0"/>
+          <a:ext cx="0" cy="0"/>
+          <a:chOff x="0" y="0"/>
+          <a:chExt cx="0" cy="0"/>
+        </a:xfrm>
+      </p:grpSpPr>
+      <p:sp>
+        <p:nvSpPr>
+          <p:cNvPr id="2" name="Slide Image Placeholder 1"/>
+          <p:cNvSpPr>
+            <a:spLocks noGrp="1"/>
+          </p:cNvSpPr>
+          <p:nvPr>
+            <p:ph type="sldImg" idx="2"/>
+          </p:nvPr>
+        </p:nvSpPr>
+        <p:spPr/>
+      </p:sp>
+      <p:sp>
+        <p:nvSpPr>
+          <p:cNvPr id="3" name="Notes Placeholder 2"/>
+          <p:cNvSpPr>
+            <a:spLocks noGrp="1"/>
+          </p:cNvSpPr>
+          <p:nvPr>
+            <p:ph type="body" idx="3" sz="quarter"/>
+          </p:nvPr>
+        </p:nvSpPr>
+        <p:spPr/>
+        <p:txBody>
+          <a:bodyPr/>
+          <a:lstStyle/>
+          <a:p>
+            <a:r>
+              <a:t>CONNECT IDENTIFIER IS 절이 있으면 관측자가 그 식별자로 다시 접속하면서 자격증명을 새로 요구한다. 로그인 자체는 성공했는데 그다음이 실패한 이유다. 대화식이라면 물어보지만 스크립트에서는 줄 방법이 없으므로 전경 실행 형식을 쓰고 셸에서 배경으로 돌린다. 관측자 이름은 호스트 이름을 쓰며, dat 파일은 재기동해도 이어서 감시하도록 상태를 담는다.</a:t>
+            </a:r>
+          </a:p>
+        </p:txBody>
+      </p:sp>
+      <p:sp>
+        <p:nvSpPr>
+          <p:cNvPr id="4" name="Slide Number Placeholder 3"/>
+          <p:cNvSpPr>
+            <a:spLocks noGrp="1"/>
+          </p:cNvSpPr>
+          <p:nvPr>
+            <p:ph type="sldNum" idx="5" sz="quarter"/>
+          </p:nvPr>
+        </p:nvSpPr>
+        <p:spPr/>
+      </p:sp>
+    </p:spTree>
+  </p:cSld>
+  <p:clrMapOvr>
+    <a:masterClrMapping/>
+  </p:clrMapOvr>
+</p:notes>
+</file>
+
+<file path=ppt/notesSlides/notesSlide25.xml><?xml version="1.0" encoding="utf-8"?>
+<p:notes xmlns:a="http://schemas.openxmlformats.org/drawingml/2006/main" xmlns:p="http://schemas.openxmlformats.org/presentationml/2006/main" xmlns:r="http://schemas.openxmlformats.org/officeDocument/2006/relationships">
+  <p:cSld>
+    <p:spTree>
+      <p:nvGrpSpPr>
+        <p:cNvPr id="1" name=""/>
+        <p:cNvGrpSpPr/>
+        <p:nvPr/>
+      </p:nvGrpSpPr>
+      <p:grpSpPr>
+        <a:xfrm>
+          <a:off x="0" y="0"/>
+          <a:ext cx="0" cy="0"/>
+          <a:chOff x="0" y="0"/>
+          <a:chExt cx="0" cy="0"/>
+        </a:xfrm>
+      </p:grpSpPr>
+      <p:sp>
+        <p:nvSpPr>
+          <p:cNvPr id="2" name="Slide Image Placeholder 1"/>
+          <p:cNvSpPr>
+            <a:spLocks noGrp="1"/>
+          </p:cNvSpPr>
+          <p:nvPr>
+            <p:ph type="sldImg" idx="2"/>
+          </p:nvPr>
+        </p:nvSpPr>
+        <p:spPr/>
+      </p:sp>
+      <p:sp>
+        <p:nvSpPr>
+          <p:cNvPr id="3" name="Notes Placeholder 2"/>
+          <p:cNvSpPr>
+            <a:spLocks noGrp="1"/>
+          </p:cNvSpPr>
+          <p:nvPr>
+            <p:ph type="body" idx="3" sz="quarter"/>
+          </p:nvPr>
+        </p:nvSpPr>
+        <p:spPr/>
+        <p:txBody>
+          <a:bodyPr/>
+          <a:lstStyle/>
+          <a:p>
+            <a:r>
+              <a:t>Last Ping 두 줄이 감시가 살아 있다는 증거이며 이 값이 커지면 관측자가 응답하지 않는 것이다. Master 라는 표시도 읽어 둔다. 19c 는 관측자를 여럿 둘 수 있고 그중 하나가 주 관측자다. 이 화면이 나와야 비로소 자동 전환이 실제로 동작하는 상태이며, 14장에서는 여기까지 가지 않고 ORA-16819 인 채로 껐다. 관측자 호스트에 직접 접속하지 않고도 이 화면으로 상태를 알 수 있다.</a:t>
+            </a:r>
+          </a:p>
+        </p:txBody>
+      </p:sp>
+      <p:sp>
+        <p:nvSpPr>
+          <p:cNvPr id="4" name="Slide Number Placeholder 3"/>
+          <p:cNvSpPr>
+            <a:spLocks noGrp="1"/>
+          </p:cNvSpPr>
+          <p:nvPr>
+            <p:ph type="sldNum" idx="5" sz="quarter"/>
+          </p:nvPr>
+        </p:nvSpPr>
+        <p:spPr/>
+      </p:sp>
+    </p:spTree>
+  </p:cSld>
+  <p:clrMapOvr>
+    <a:masterClrMapping/>
+  </p:clrMapOvr>
+</p:notes>
+</file>
+
+<file path=ppt/notesSlides/notesSlide26.xml><?xml version="1.0" encoding="utf-8"?>
+<p:notes xmlns:a="http://schemas.openxmlformats.org/drawingml/2006/main" xmlns:p="http://schemas.openxmlformats.org/presentationml/2006/main" xmlns:r="http://schemas.openxmlformats.org/officeDocument/2006/relationships">
+  <p:cSld>
+    <p:spTree>
+      <p:nvGrpSpPr>
+        <p:cNvPr id="1" name=""/>
+        <p:cNvGrpSpPr/>
+        <p:nvPr/>
+      </p:nvGrpSpPr>
+      <p:grpSpPr>
+        <a:xfrm>
+          <a:off x="0" y="0"/>
+          <a:ext cx="0" cy="0"/>
+          <a:chOff x="0" y="0"/>
+          <a:chExt cx="0" cy="0"/>
+        </a:xfrm>
+      </p:grpSpPr>
+      <p:sp>
+        <p:nvSpPr>
+          <p:cNvPr id="2" name="Slide Image Placeholder 1"/>
+          <p:cNvSpPr>
+            <a:spLocks noGrp="1"/>
+          </p:cNvSpPr>
+          <p:nvPr>
+            <p:ph type="sldImg" idx="2"/>
+          </p:nvPr>
+        </p:nvSpPr>
+        <p:spPr/>
+      </p:sp>
+      <p:sp>
+        <p:nvSpPr>
+          <p:cNvPr id="3" name="Notes Placeholder 2"/>
+          <p:cNvSpPr>
+            <a:spLocks noGrp="1"/>
+          </p:cNvSpPr>
+          <p:nvPr>
+            <p:ph type="body" idx="3" sz="quarter"/>
+          </p:nvPr>
+        </p:nvSpPr>
+        <p:spPr/>
+        <p:txBody>
+          <a:bodyPr/>
+          <a:lstStyle/>
+          <a:p>
+            <a:r>
+              <a:t>53초의 MOUNTED 가 전환이 진행 중인 순간이며 Active Data Guard 로 조회하던 세션은 이때 끊긴다. 전환 자체는 33초였고 강제 종료부터 세면 69초다. 차이인 36초가 Threshold 30초와 확인 절차다. 손실은 없었다. 실습 07 의 수동 Failover 와 같은 이유이며 역시 보장은 아니다. 실습 07 의 수동 Failover 24초와 비교하면 판단에 쓰인 시간이 얼마인지 드러난다.</a:t>
+            </a:r>
+          </a:p>
+        </p:txBody>
+      </p:sp>
+      <p:sp>
+        <p:nvSpPr>
+          <p:cNvPr id="4" name="Slide Number Placeholder 3"/>
+          <p:cNvSpPr>
+            <a:spLocks noGrp="1"/>
+          </p:cNvSpPr>
+          <p:nvPr>
+            <p:ph type="sldNum" idx="5" sz="quarter"/>
+          </p:nvPr>
+        </p:nvSpPr>
+        <p:spPr/>
+      </p:sp>
+    </p:spTree>
+  </p:cSld>
+  <p:clrMapOvr>
+    <a:masterClrMapping/>
+  </p:clrMapOvr>
+</p:notes>
+</file>
+
+<file path=ppt/notesSlides/notesSlide27.xml><?xml version="1.0" encoding="utf-8"?>
+<p:notes xmlns:a="http://schemas.openxmlformats.org/drawingml/2006/main" xmlns:p="http://schemas.openxmlformats.org/presentationml/2006/main" xmlns:r="http://schemas.openxmlformats.org/officeDocument/2006/relationships">
+  <p:cSld>
+    <p:spTree>
+      <p:nvGrpSpPr>
+        <p:cNvPr id="1" name=""/>
+        <p:cNvGrpSpPr/>
+        <p:nvPr/>
+      </p:nvGrpSpPr>
+      <p:grpSpPr>
+        <a:xfrm>
+          <a:off x="0" y="0"/>
+          <a:ext cx="0" cy="0"/>
+          <a:chOff x="0" y="0"/>
+          <a:chExt cx="0" cy="0"/>
+        </a:xfrm>
+      </p:grpSpPr>
+      <p:sp>
+        <p:nvSpPr>
+          <p:cNvPr id="2" name="Slide Image Placeholder 1"/>
+          <p:cNvSpPr>
+            <a:spLocks noGrp="1"/>
+          </p:cNvSpPr>
+          <p:nvPr>
+            <p:ph type="sldImg" idx="2"/>
+          </p:nvPr>
+        </p:nvSpPr>
+        <p:spPr/>
+      </p:sp>
+      <p:sp>
+        <p:nvSpPr>
+          <p:cNvPr id="3" name="Notes Placeholder 2"/>
+          <p:cNvSpPr>
+            <a:spLocks noGrp="1"/>
+          </p:cNvSpPr>
+          <p:nvPr>
+            <p:ph type="body" idx="3" sz="quarter"/>
+          </p:nvPr>
+        </p:nvSpPr>
+        <p:spPr/>
+        <p:txBody>
+          <a:bodyPr/>
+          <a:lstStyle/>
+          <a:p>
+            <a:r>
+              <a:t>임계값이 지났는데도 한 번 거부한다. Standby 가 방금까지 Primary 와 연락하고 있었다는 이유다. 관측자에게만 안 보이는 상황일 수 있으므로 두 곳이 모두 안 보인다고 해야 진행한다. 14장에서 관측자가 제3의 위치에 있어야 한다고 설명한 이유가 여기서 동작으로 확인된다. 이 한 줄이 자동 전환을 신뢰할 수 있게 만드는 근거다. 두 곳의 관점이 일치해야 움직인다는 설계를 기억해 둔다.</a:t>
+            </a:r>
+          </a:p>
+        </p:txBody>
+      </p:sp>
+      <p:sp>
+        <p:nvSpPr>
+          <p:cNvPr id="4" name="Slide Number Placeholder 3"/>
+          <p:cNvSpPr>
+            <a:spLocks noGrp="1"/>
+          </p:cNvSpPr>
+          <p:nvPr>
+            <p:ph type="sldNum" idx="5" sz="quarter"/>
+          </p:nvPr>
+        </p:nvSpPr>
+        <p:spPr/>
+      </p:sp>
+    </p:spTree>
+  </p:cSld>
+  <p:clrMapOvr>
+    <a:masterClrMapping/>
+  </p:clrMapOvr>
+</p:notes>
+</file>
+
+<file path=ppt/notesSlides/notesSlide28.xml><?xml version="1.0" encoding="utf-8"?>
+<p:notes xmlns:a="http://schemas.openxmlformats.org/drawingml/2006/main" xmlns:p="http://schemas.openxmlformats.org/presentationml/2006/main" xmlns:r="http://schemas.openxmlformats.org/officeDocument/2006/relationships">
+  <p:cSld>
+    <p:spTree>
+      <p:nvGrpSpPr>
+        <p:cNvPr id="1" name=""/>
+        <p:cNvGrpSpPr/>
+        <p:nvPr/>
+      </p:nvGrpSpPr>
+      <p:grpSpPr>
+        <a:xfrm>
+          <a:off x="0" y="0"/>
+          <a:ext cx="0" cy="0"/>
+          <a:chOff x="0" y="0"/>
+          <a:chExt cx="0" cy="0"/>
+        </a:xfrm>
+      </p:grpSpPr>
+      <p:sp>
+        <p:nvSpPr>
+          <p:cNvPr id="2" name="Slide Image Placeholder 1"/>
+          <p:cNvSpPr>
+            <a:spLocks noGrp="1"/>
+          </p:cNvSpPr>
+          <p:nvPr>
+            <p:ph type="sldImg" idx="2"/>
+          </p:nvPr>
+        </p:nvSpPr>
+        <p:spPr/>
+      </p:sp>
+      <p:sp>
+        <p:nvSpPr>
+          <p:cNvPr id="3" name="Notes Placeholder 2"/>
+          <p:cNvSpPr>
+            <a:spLocks noGrp="1"/>
+          </p:cNvSpPr>
+          <p:nvPr>
+            <p:ph type="body" idx="3" sz="quarter"/>
+          </p:nvPr>
+        </p:nvSpPr>
+        <p:spPr/>
+        <p:txBody>
+          <a:bodyPr/>
+          <a:lstStyle/>
+          <a:p>
+            <a:r>
+              <a:t>14장에서 값만 보고 넘어간 Auto-reinstate: TRUE 가 이 동작이다. 반복되는 Failed to ping 은 MOUNT 직후 아직 준비가 안 된 것이며 될 때까지 재시도한다. 진행 중에는 구성에 ORA-16657 이 붙는다. 재편입은 역할을 되돌리는 데까지이고 Intended State 적용은 별개 단계이므로, 자동 전환 뒤에는 역할과 적용을 두 번 확인한다.</a:t>
+            </a:r>
+          </a:p>
+        </p:txBody>
+      </p:sp>
+      <p:sp>
+        <p:nvSpPr>
+          <p:cNvPr id="4" name="Slide Number Placeholder 3"/>
+          <p:cNvSpPr>
+            <a:spLocks noGrp="1"/>
+          </p:cNvSpPr>
+          <p:nvPr>
+            <p:ph type="sldNum" idx="5" sz="quarter"/>
+          </p:nvPr>
+        </p:nvSpPr>
+        <p:spPr/>
+      </p:sp>
+    </p:spTree>
+  </p:cSld>
+  <p:clrMapOvr>
+    <a:masterClrMapping/>
+  </p:clrMapOvr>
+</p:notes>
+</file>
+
+<file path=ppt/notesSlides/notesSlide29.xml><?xml version="1.0" encoding="utf-8"?>
+<p:notes xmlns:a="http://schemas.openxmlformats.org/drawingml/2006/main" xmlns:p="http://schemas.openxmlformats.org/presentationml/2006/main" xmlns:r="http://schemas.openxmlformats.org/officeDocument/2006/relationships">
+  <p:cSld>
+    <p:spTree>
+      <p:nvGrpSpPr>
+        <p:cNvPr id="1" name=""/>
+        <p:cNvGrpSpPr/>
+        <p:nvPr/>
+      </p:nvGrpSpPr>
+      <p:grpSpPr>
+        <a:xfrm>
+          <a:off x="0" y="0"/>
+          <a:ext cx="0" cy="0"/>
+          <a:chOff x="0" y="0"/>
+          <a:chExt cx="0" cy="0"/>
+        </a:xfrm>
+      </p:grpSpPr>
+      <p:sp>
+        <p:nvSpPr>
+          <p:cNvPr id="2" name="Slide Image Placeholder 1"/>
+          <p:cNvSpPr>
+            <a:spLocks noGrp="1"/>
+          </p:cNvSpPr>
+          <p:nvPr>
+            <p:ph type="sldImg" idx="2"/>
+          </p:nvPr>
+        </p:nvSpPr>
+        <p:spPr/>
+      </p:sp>
+      <p:sp>
+        <p:nvSpPr>
+          <p:cNvPr id="3" name="Notes Placeholder 2"/>
+          <p:cNvSpPr>
+            <a:spLocks noGrp="1"/>
+          </p:cNvSpPr>
+          <p:nvPr>
+            <p:ph type="body" idx="3" sz="quarter"/>
+          </p:nvPr>
+        </p:nvSpPr>
+        <p:spPr/>
+        <p:txBody>
+          <a:bodyPr/>
+          <a:lstStyle/>
+          <a:p>
+            <a:r>
+              <a:t>RMAN-06820 은 아카이브를 빠짐없이 받으려면 Primary 의 현재 로그를 먼저 아카이브해야 하는데 자격증명이 없어 나는 경고다. 백업은 그대로 진행된다. 가장 단순한 배분은 데이터 파일은 Standby 에서, 아카이브는 Primary 에서 받는 것이다. 컨트롤 파일 자동 백업은 FORMAT 절을 따르지 않고 FRA 로 간다는 점도 함께 기억한다. 열린 채로 받았고 MRP 는 그동안 계속 적용했다는 점도 확인한다.</a:t>
+            </a:r>
+          </a:p>
+        </p:txBody>
+      </p:sp>
+      <p:sp>
+        <p:nvSpPr>
+          <p:cNvPr id="4" name="Slide Number Placeholder 3"/>
+          <p:cNvSpPr>
+            <a:spLocks noGrp="1"/>
+          </p:cNvSpPr>
+          <p:nvPr>
+            <p:ph type="sldNum" idx="5" sz="quarter"/>
+          </p:nvPr>
+        </p:nvSpPr>
+        <p:spPr/>
+      </p:sp>
+    </p:spTree>
+  </p:cSld>
+  <p:clrMapOvr>
+    <a:masterClrMapping/>
+  </p:clrMapOvr>
+</p:notes>
+</file>
+
 <file path=ppt/notesSlides/notesSlide3.xml><?xml version="1.0" encoding="utf-8"?>
 <p:notes xmlns:a="http://schemas.openxmlformats.org/drawingml/2006/main" xmlns:p="http://schemas.openxmlformats.org/presentationml/2006/main" xmlns:r="http://schemas.openxmlformats.org/officeDocument/2006/relationships">
   <p:cSld>
@@ -1657,6 +2087,146 @@
           <a:p>
             <a:r>
               <a:t>NOT ALLOWED 를 문제로 읽지 않는다. Standby 쪽에서 전환을 시작할 수 없다는 뜻일 뿐이며 명령은 Primary 쪽에서 낸다. 15장부터 반복한 주제가 여기서도 나온다. 뷰의 값이 무엇을 뜻하는지 알아야 판정할 수 있다. 감시 스크립트가 이 값을 이상 신호로 쓰면 Standby 에서 상시 오경보가 나므로 역할별로 기댓값을 나눠 두어야 한다. 실측에서 전환 후 두 값이 그대로 뒤바뀌었다.</a:t>
+            </a:r>
+          </a:p>
+        </p:txBody>
+      </p:sp>
+      <p:sp>
+        <p:nvSpPr>
+          <p:cNvPr id="4" name="Slide Number Placeholder 3"/>
+          <p:cNvSpPr>
+            <a:spLocks noGrp="1"/>
+          </p:cNvSpPr>
+          <p:nvPr>
+            <p:ph type="sldNum" idx="5" sz="quarter"/>
+          </p:nvPr>
+        </p:nvSpPr>
+        <p:spPr/>
+      </p:sp>
+    </p:spTree>
+  </p:cSld>
+  <p:clrMapOvr>
+    <a:masterClrMapping/>
+  </p:clrMapOvr>
+</p:notes>
+</file>
+
+<file path=ppt/notesSlides/notesSlide30.xml><?xml version="1.0" encoding="utf-8"?>
+<p:notes xmlns:a="http://schemas.openxmlformats.org/drawingml/2006/main" xmlns:p="http://schemas.openxmlformats.org/presentationml/2006/main" xmlns:r="http://schemas.openxmlformats.org/officeDocument/2006/relationships">
+  <p:cSld>
+    <p:spTree>
+      <p:nvGrpSpPr>
+        <p:cNvPr id="1" name=""/>
+        <p:cNvGrpSpPr/>
+        <p:nvPr/>
+      </p:nvGrpSpPr>
+      <p:grpSpPr>
+        <a:xfrm>
+          <a:off x="0" y="0"/>
+          <a:ext cx="0" cy="0"/>
+          <a:chOff x="0" y="0"/>
+          <a:chExt cx="0" cy="0"/>
+        </a:xfrm>
+      </p:grpSpPr>
+      <p:sp>
+        <p:nvSpPr>
+          <p:cNvPr id="2" name="Slide Image Placeholder 1"/>
+          <p:cNvSpPr>
+            <a:spLocks noGrp="1"/>
+          </p:cNvSpPr>
+          <p:nvPr>
+            <p:ph type="sldImg" idx="2"/>
+          </p:nvPr>
+        </p:nvSpPr>
+        <p:spPr/>
+      </p:sp>
+      <p:sp>
+        <p:nvSpPr>
+          <p:cNvPr id="3" name="Notes Placeholder 2"/>
+          <p:cNvSpPr>
+            <a:spLocks noGrp="1"/>
+          </p:cNvSpPr>
+          <p:nvPr>
+            <p:ph type="body" idx="3" sz="quarter"/>
+          </p:nvPr>
+        </p:nvSpPr>
+        <p:spPr/>
+        <p:txBody>
+          <a:bodyPr/>
+          <a:lstStyle/>
+          <a:p>
+            <a:r>
+              <a:t>컨트롤 파일은 리두로 복제되는 대상이 아니다. 8장에서 데이터 파일 추가는 전파되지만 컨트롤 파일 자체는 각자 관리한다고 배웠고 백업 이력도 마찬가지다. 그러므로 Standby 에서 백업받으면 된다는 말은 절반만 맞다. 백업 자체는 쓸 수 있지만 Primary 가 그 존재를 모르며, 재해가 나서 급할 때 이것을 알게 되면 곤란하다. 이 사실을 모르고 Standby 백업만 믿으면 정작 복구할 때 목록에서 찾지 못한다.</a:t>
+            </a:r>
+          </a:p>
+        </p:txBody>
+      </p:sp>
+      <p:sp>
+        <p:nvSpPr>
+          <p:cNvPr id="4" name="Slide Number Placeholder 3"/>
+          <p:cNvSpPr>
+            <a:spLocks noGrp="1"/>
+          </p:cNvSpPr>
+          <p:nvPr>
+            <p:ph type="sldNum" idx="5" sz="quarter"/>
+          </p:nvPr>
+        </p:nvSpPr>
+        <p:spPr/>
+      </p:sp>
+    </p:spTree>
+  </p:cSld>
+  <p:clrMapOvr>
+    <a:masterClrMapping/>
+  </p:clrMapOvr>
+</p:notes>
+</file>
+
+<file path=ppt/notesSlides/notesSlide31.xml><?xml version="1.0" encoding="utf-8"?>
+<p:notes xmlns:a="http://schemas.openxmlformats.org/drawingml/2006/main" xmlns:p="http://schemas.openxmlformats.org/presentationml/2006/main" xmlns:r="http://schemas.openxmlformats.org/officeDocument/2006/relationships">
+  <p:cSld>
+    <p:spTree>
+      <p:nvGrpSpPr>
+        <p:cNvPr id="1" name=""/>
+        <p:cNvGrpSpPr/>
+        <p:nvPr/>
+      </p:nvGrpSpPr>
+      <p:grpSpPr>
+        <a:xfrm>
+          <a:off x="0" y="0"/>
+          <a:ext cx="0" cy="0"/>
+          <a:chOff x="0" y="0"/>
+          <a:chExt cx="0" cy="0"/>
+        </a:xfrm>
+      </p:grpSpPr>
+      <p:sp>
+        <p:nvSpPr>
+          <p:cNvPr id="2" name="Slide Image Placeholder 1"/>
+          <p:cNvSpPr>
+            <a:spLocks noGrp="1"/>
+          </p:cNvSpPr>
+          <p:nvPr>
+            <p:ph type="sldImg" idx="2"/>
+          </p:nvPr>
+        </p:nvSpPr>
+        <p:spPr/>
+      </p:sp>
+      <p:sp>
+        <p:nvSpPr>
+          <p:cNvPr id="3" name="Notes Placeholder 2"/>
+          <p:cNvSpPr>
+            <a:spLocks noGrp="1"/>
+          </p:cNvSpPr>
+          <p:nvPr>
+            <p:ph type="body" idx="3" sz="quarter"/>
+          </p:nvPr>
+        </p:nvSpPr>
+        <p:spPr/>
+        <p:txBody>
+          <a:bodyPr/>
+          <a:lstStyle/>
+          <a:p>
+            <a:r>
+              <a:t>카탈로그는 DB_UNIQUE_NAME 으로 구성원을 구별한다. DBID 가 같아 그것만으로는 어느 쪽인지 알 수 없기 때문이며 16.3절의 원칙이 여기서도 적용된다. 두 번째 방법의 결론이 마지막 줄이다. 백업은 boston 에서 받았는데 chicago 에 등록하니 chicago 의 파일 이름으로 나온다. 6장에서 양쪽을 OMF 와 수동 경로로 다르게 구성했는데도 그대로 쓸 수 있다.</a:t>
             </a:r>
           </a:p>
         </p:txBody>
@@ -11425,7 +11995,7 @@
         <p:spPr>
           <a:xfrm>
             <a:off x="0" y="0"/>
-            <a:ext cx="12191695" cy="1005840"/>
+            <a:ext cx="12191695" cy="6858000"/>
           </a:xfrm>
           <a:prstGeom prst="rect">
             <a:avLst/>
@@ -11468,8 +12038,8 @@
         </p:nvSpPr>
         <p:spPr>
           <a:xfrm>
-            <a:off x="548640" y="91440"/>
-            <a:ext cx="10972800" cy="777240"/>
+            <a:off x="822960" y="2011680"/>
+            <a:ext cx="10515600" cy="1097280"/>
           </a:xfrm>
           <a:prstGeom prst="rect">
             <a:avLst/>
@@ -11488,13 +12058,13 @@
               </a:spcAft>
             </a:pPr>
             <a:r>
-              <a:rPr sz="2600" b="1">
+              <a:rPr sz="4000" b="1">
                 <a:solidFill>
                   <a:srgbClr val="FFFFFF"/>
                 </a:solidFill>
                 <a:latin typeface="맑은 고딕"/>
               </a:rPr>
-              <a:t>요약</a:t>
+              <a:t>16.10</a:t>
             </a:r>
           </a:p>
         </p:txBody>
@@ -11507,8 +12077,8 @@
         </p:nvSpPr>
         <p:spPr>
           <a:xfrm>
-            <a:off x="640080" y="1371600"/>
-            <a:ext cx="10881360" cy="5120640"/>
+            <a:off x="822960" y="3017520"/>
+            <a:ext cx="10515600" cy="914400"/>
           </a:xfrm>
           <a:prstGeom prst="rect">
             <a:avLst/>
@@ -11523,241 +12093,116 @@
           <a:p>
             <a:pPr algn="l">
               <a:spcAft>
-                <a:spcPts val="1000"/>
+                <a:spcPts val="600"/>
+              </a:spcAft>
+            </a:pPr>
+            <a:r>
+              <a:rPr sz="2800" b="1">
+                <a:solidFill>
+                  <a:srgbClr val="FFFFFF"/>
+                </a:solidFill>
+                <a:latin typeface="맑은 고딕"/>
+              </a:rPr>
+              <a:t>관측자와 자동 전환</a:t>
+            </a:r>
+          </a:p>
+        </p:txBody>
+      </p:sp>
+      <p:sp>
+        <p:nvSpPr>
+          <p:cNvPr id="5" name="Rectangle 4"/>
+          <p:cNvSpPr/>
+          <p:nvPr/>
+        </p:nvSpPr>
+        <p:spPr>
+          <a:xfrm>
+            <a:off x="822960" y="4114800"/>
+            <a:ext cx="5486400" cy="54864"/>
+          </a:xfrm>
+          <a:prstGeom prst="rect">
+            <a:avLst/>
+          </a:prstGeom>
+          <a:solidFill>
+            <a:srgbClr val="FFFFFF"/>
+          </a:solidFill>
+          <a:ln>
+            <a:noFill/>
+          </a:ln>
+          <a:effectLst/>
+        </p:spPr>
+        <p:style>
+          <a:lnRef idx="1">
+            <a:schemeClr val="accent1"/>
+          </a:lnRef>
+          <a:fillRef idx="3">
+            <a:schemeClr val="accent1"/>
+          </a:fillRef>
+          <a:effectRef idx="2">
+            <a:schemeClr val="accent1"/>
+          </a:effectRef>
+          <a:fontRef idx="minor">
+            <a:schemeClr val="lt1"/>
+          </a:fontRef>
+        </p:style>
+        <p:txBody>
+          <a:bodyPr rtlCol="0" anchor="ctr"/>
+          <a:lstStyle/>
+          <a:p>
+            <a:pPr algn="ctr"/>
+          </a:p>
+        </p:txBody>
+      </p:sp>
+      <p:sp>
+        <p:nvSpPr>
+          <p:cNvPr id="6" name="TextBox 5"/>
+          <p:cNvSpPr txBox="1"/>
+          <p:nvPr/>
+        </p:nvSpPr>
+        <p:spPr>
+          <a:xfrm>
+            <a:off x="822960" y="4297680"/>
+            <a:ext cx="10058400" cy="2011680"/>
+          </a:xfrm>
+          <a:prstGeom prst="rect">
+            <a:avLst/>
+          </a:prstGeom>
+          <a:noFill/>
+        </p:spPr>
+        <p:txBody>
+          <a:bodyPr wrap="square">
+            <a:spAutoFit/>
+          </a:bodyPr>
+          <a:lstStyle/>
+          <a:p>
+            <a:pPr algn="l">
+              <a:spcAft>
+                <a:spcPts val="800"/>
               </a:spcAft>
             </a:pPr>
             <a:r>
               <a:rPr sz="1600" b="0">
                 <a:solidFill>
-                  <a:srgbClr val="222222"/>
-                </a:solidFill>
-                <a:latin typeface="맑은 고딕"/>
-              </a:rPr>
-              <a:t>•  Switchover 는 **무손실·되돌림 가능**, Failover 는 **손실 가능·Reinstate 필요**</a:t>
-            </a:r>
-          </a:p>
-          <a:p>
-            <a:pPr algn="l">
-              <a:spcAft>
-                <a:spcPts val="1000"/>
+                  <a:srgbClr val="FFFFFF"/>
+                </a:solidFill>
+                <a:latin typeface="맑은 고딕"/>
+              </a:rPr>
+              <a:t>•  제3 호스트에 띄운다</a:t>
+            </a:r>
+          </a:p>
+          <a:p>
+            <a:pPr algn="l">
+              <a:spcAft>
+                <a:spcPts val="800"/>
               </a:spcAft>
             </a:pPr>
             <a:r>
               <a:rPr sz="1600" b="0">
                 <a:solidFill>
-                  <a:srgbClr val="222222"/>
-                </a:solidFill>
-                <a:latin typeface="맑은 고딕"/>
-              </a:rPr>
-              <a:t>•  `SWITCHOVER_STATUS` — Primary `TO STANDBY`, Standby `NOT ALLOWED`(정상)</a:t>
-            </a:r>
-          </a:p>
-          <a:p>
-            <a:pPr algn="l">
-              <a:spcAft>
-                <a:spcPts val="1000"/>
-              </a:spcAft>
-            </a:pPr>
-            <a:r>
-              <a:rPr sz="1600" b="0">
-                <a:solidFill>
-                  <a:srgbClr val="222222"/>
-                </a:solidFill>
-                <a:latin typeface="맑은 고딕"/>
-              </a:rPr>
-              <a:t>•  `Connected to an idle instance.` — **정적 등록이 여기서 쓰인다**</a:t>
-            </a:r>
-          </a:p>
-          <a:p>
-            <a:pPr algn="l">
-              <a:spcAft>
-                <a:spcPts val="1000"/>
-              </a:spcAft>
-            </a:pPr>
-            <a:r>
-              <a:rPr sz="1600" b="0">
-                <a:solidFill>
-                  <a:srgbClr val="222222"/>
-                </a:solidFill>
-                <a:latin typeface="맑은 고딕"/>
-              </a:rPr>
-              <a:t>•  `Database opened.` — **Active Data Guard 가 전환 후에도 유지**</a:t>
-            </a:r>
-          </a:p>
-          <a:p>
-            <a:pPr algn="l">
-              <a:spcAft>
-                <a:spcPts val="1000"/>
-              </a:spcAft>
-            </a:pPr>
-            <a:r>
-              <a:rPr sz="1600" b="0">
-                <a:solidFill>
-                  <a:srgbClr val="222222"/>
-                </a:solidFill>
-                <a:latin typeface="맑은 고딕"/>
-              </a:rPr>
-              <a:t>•  `DB_NAME` 은 양쪽 `CHICAGO`. 구별은 **`DB_UNIQUE_NAME`**</a:t>
-            </a:r>
-          </a:p>
-          <a:p>
-            <a:pPr algn="l">
-              <a:spcAft>
-                <a:spcPts val="1000"/>
-              </a:spcAft>
-            </a:pPr>
-            <a:r>
-              <a:rPr sz="1600" b="0">
-                <a:solidFill>
-                  <a:srgbClr val="222222"/>
-                </a:solidFill>
-                <a:latin typeface="맑은 고딕"/>
-              </a:rPr>
-              <a:t>•  전환하면 Broker 가 목적지를 **반대 방향으로 다시 쓴다**</a:t>
-            </a:r>
-          </a:p>
-          <a:p>
-            <a:pPr algn="l">
-              <a:spcAft>
-                <a:spcPts val="1000"/>
-              </a:spcAft>
-            </a:pPr>
-            <a:r>
-              <a:rPr sz="1600" b="0">
-                <a:solidFill>
-                  <a:srgbClr val="222222"/>
-                </a:solidFill>
-                <a:latin typeface="맑은 고딕"/>
-              </a:rPr>
-              <a:t>•  없는 멤버는 문장, 자기 자신은 **ORA-16558**</a:t>
-            </a:r>
-          </a:p>
-          <a:p>
-            <a:pPr algn="l">
-              <a:spcAft>
-                <a:spcPts val="1000"/>
-              </a:spcAft>
-            </a:pPr>
-            <a:r>
-              <a:rPr sz="1600" b="0">
-                <a:solidFill>
-                  <a:srgbClr val="222222"/>
-                </a:solidFill>
-                <a:latin typeface="맑은 고딕"/>
-              </a:rPr>
-              <a:t>•  **★ SQL 전환은 거부되지 않는다.** 역할만 바뀌고 뒷정리가 없다</a:t>
-            </a:r>
-          </a:p>
-          <a:p>
-            <a:pPr algn="l">
-              <a:spcAft>
-                <a:spcPts val="1000"/>
-              </a:spcAft>
-            </a:pPr>
-            <a:r>
-              <a:rPr sz="1600" b="0">
-                <a:solidFill>
-                  <a:srgbClr val="222222"/>
-                </a:solidFill>
-                <a:latin typeface="맑은 고딕"/>
-              </a:rPr>
-              <a:t>•  그 결과 **ORA-16816**, 복구는 `REMOVE`→`CREATE`→`ADD`→`ENABLE`</a:t>
-            </a:r>
-          </a:p>
-          <a:p>
-            <a:pPr algn="l">
-              <a:spcAft>
-                <a:spcPts val="1000"/>
-              </a:spcAft>
-            </a:pPr>
-            <a:r>
-              <a:rPr sz="1600" b="0">
-                <a:solidFill>
-                  <a:srgbClr val="222222"/>
-                </a:solidFill>
-                <a:latin typeface="맑은 고딕"/>
-              </a:rPr>
-              <a:t>•  플래시백은 열린 채로 켜진다. 이미 켜졌으면 **ORA-38706+38713**</a:t>
-            </a:r>
-          </a:p>
-          <a:p>
-            <a:pPr algn="l">
-              <a:spcAft>
-                <a:spcPts val="1000"/>
-              </a:spcAft>
-            </a:pPr>
-            <a:r>
-              <a:rPr sz="1600" b="0">
-                <a:solidFill>
-                  <a:srgbClr val="222222"/>
-                </a:solidFill>
-                <a:latin typeface="맑은 고딕"/>
-              </a:rPr>
-              <a:t>•  Standby 는 **`Possible network disconnect`** 라고만 말한다 (`ERROR_CODE` 0)</a:t>
-            </a:r>
-          </a:p>
-          <a:p>
-            <a:pPr algn="l">
-              <a:spcAft>
-                <a:spcPts val="1000"/>
-              </a:spcAft>
-            </a:pPr>
-            <a:r>
-              <a:rPr sz="1600" b="0">
-                <a:solidFill>
-                  <a:srgbClr val="222222"/>
-                </a:solidFill>
-                <a:latin typeface="맑은 고딕"/>
-              </a:rPr>
-              <a:t>•  Failover 직후 `(disabled)` + **ORA-16661** 인데 상태는 **`SUCCESS`**</a:t>
-            </a:r>
-          </a:p>
-          <a:p>
-            <a:pPr algn="l">
-              <a:spcAft>
-                <a:spcPts val="1000"/>
-              </a:spcAft>
-            </a:pPr>
-            <a:r>
-              <a:rPr sz="1600" b="0">
-                <a:solidFill>
-                  <a:srgbClr val="222222"/>
-                </a:solidFill>
-                <a:latin typeface="맑은 고딕"/>
-              </a:rPr>
-              <a:t>•  내려간 채로 Reinstate → **ORA-16653**. `MOUNT` 까지만 올린다</a:t>
-            </a:r>
-          </a:p>
-          <a:p>
-            <a:pPr algn="l">
-              <a:spcAft>
-                <a:spcPts val="1000"/>
-              </a:spcAft>
-            </a:pPr>
-            <a:r>
-              <a:rPr sz="1600" b="0">
-                <a:solidFill>
-                  <a:srgbClr val="222222"/>
-                </a:solidFill>
-                <a:latin typeface="맑은 고딕"/>
-              </a:rPr>
-              <a:t>•  Failover 는 `OPEN RESETLOGS` — 시퀀스가 **4로 다시 시작**</a:t>
-            </a:r>
-          </a:p>
-          <a:p>
-            <a:pPr algn="l">
-              <a:spcAft>
-                <a:spcPts val="1000"/>
-              </a:spcAft>
-            </a:pPr>
-            <a:r>
-              <a:rPr sz="1600" b="0">
-                <a:solidFill>
-                  <a:srgbClr val="222222"/>
-                </a:solidFill>
-                <a:latin typeface="맑은 고딕"/>
-              </a:rPr>
-              <a:t>•  전환 직후의 `ORA-16786`·`ORA-16854` 는 **판정 시차**</a:t>
+                  <a:srgbClr val="FFFFFF"/>
+                </a:solidFill>
+                <a:latin typeface="맑은 고딕"/>
+              </a:rPr>
+              <a:t>•  명령 없이 일어난다</a:t>
             </a:r>
           </a:p>
         </p:txBody>
@@ -11858,7 +12303,7 @@
                 </a:solidFill>
                 <a:latin typeface="맑은 고딕"/>
               </a:rPr>
-              <a:t>과정을 닫으며</a:t>
+              <a:t>관측자를 띄운다</a:t>
             </a:r>
           </a:p>
         </p:txBody>
@@ -11871,8 +12316,8 @@
         </p:nvSpPr>
         <p:spPr>
           <a:xfrm>
-            <a:off x="640080" y="1371600"/>
-            <a:ext cx="10881360" cy="5120640"/>
+            <a:off x="640080" y="1078992"/>
+            <a:ext cx="10881360" cy="457200"/>
           </a:xfrm>
           <a:prstGeom prst="rect">
             <a:avLst/>
@@ -11887,17 +12332,56 @@
           <a:p>
             <a:pPr algn="l">
               <a:spcAft>
+                <a:spcPts val="600"/>
+              </a:spcAft>
+            </a:pPr>
+            <a:r>
+              <a:rPr sz="1500" b="0">
+                <a:solidFill>
+                  <a:srgbClr val="5A6672"/>
+                </a:solidFill>
+                <a:latin typeface="맑은 고딕"/>
+              </a:rPr>
+              <a:t>기동에 함정이 있다</a:t>
+            </a:r>
+          </a:p>
+        </p:txBody>
+      </p:sp>
+      <p:sp>
+        <p:nvSpPr>
+          <p:cNvPr id="5" name="TextBox 4"/>
+          <p:cNvSpPr txBox="1"/>
+          <p:nvPr/>
+        </p:nvSpPr>
+        <p:spPr>
+          <a:xfrm>
+            <a:off x="640080" y="1737360"/>
+            <a:ext cx="10881360" cy="4754880"/>
+          </a:xfrm>
+          <a:prstGeom prst="rect">
+            <a:avLst/>
+          </a:prstGeom>
+          <a:noFill/>
+        </p:spPr>
+        <p:txBody>
+          <a:bodyPr wrap="square">
+            <a:spAutoFit/>
+          </a:bodyPr>
+          <a:lstStyle/>
+          <a:p>
+            <a:pPr algn="l">
+              <a:spcAft>
                 <a:spcPts val="1000"/>
               </a:spcAft>
             </a:pPr>
             <a:r>
-              <a:rPr sz="1600" b="0">
+              <a:rPr sz="1700" b="0">
                 <a:solidFill>
                   <a:srgbClr val="222222"/>
                 </a:solidFill>
                 <a:latin typeface="맑은 고딕"/>
               </a:rPr>
-              <a:t>•  1장에서 시작해 16장에서 실제로 역할을 바꿨다</a:t>
+              <a:t>•  호스트 **farsync-srv** — 인스턴스 없이 소프트웨어만</a:t>
             </a:r>
           </a:p>
           <a:p>
@@ -11907,13 +12391,13 @@
               </a:spcAft>
             </a:pPr>
             <a:r>
-              <a:rPr sz="1600" b="0">
+              <a:rPr sz="1700" b="0">
                 <a:solidFill>
                   <a:srgbClr val="222222"/>
                 </a:solidFill>
                 <a:latin typeface="맑은 고딕"/>
               </a:rPr>
-              <a:t>•  관통하는 원칙 셋</a:t>
+              <a:t>•  `CONNECT IDENTIFIER IS` 형식 → **`ORA-01017`**</a:t>
             </a:r>
           </a:p>
           <a:p>
@@ -11923,13 +12407,13 @@
               </a:spcAft>
             </a:pPr>
             <a:r>
-              <a:rPr sz="1600" b="0">
+              <a:rPr sz="1700" b="0">
                 <a:solidFill>
                   <a:srgbClr val="222222"/>
                 </a:solidFill>
                 <a:latin typeface="맑은 고딕"/>
               </a:rPr>
-              <a:t>•  **① `SUCCESS` 를 안전으로 읽지 않는다** (14~16장에서 네 번)</a:t>
+              <a:t>•  `nohup dgmgrl ... "start observer file='...'" &amp;` 로 띄운다</a:t>
             </a:r>
           </a:p>
           <a:p>
@@ -11939,15 +12423,178 @@
               </a:spcAft>
             </a:pPr>
             <a:r>
-              <a:rPr sz="1600" b="0">
+              <a:rPr sz="1700" b="0">
                 <a:solidFill>
                   <a:srgbClr val="222222"/>
                 </a:solidFill>
                 <a:latin typeface="맑은 고딕"/>
               </a:rPr>
-              <a:t>•  **② 요약이 아니라 흐름을 본다** (15장의 주 지표)</a:t>
-            </a:r>
-          </a:p>
+              <a:t>•  `Observer 'farsync-srv' started` / `.dat` 116바이트</a:t>
+            </a:r>
+          </a:p>
+        </p:txBody>
+      </p:sp>
+    </p:spTree>
+  </p:cSld>
+  <p:clrMapOvr>
+    <a:masterClrMapping/>
+  </p:clrMapOvr>
+</p:sld>
+</file>
+
+<file path=ppt/slides/slide36.xml><?xml version="1.0" encoding="utf-8"?>
+<p:sld xmlns:a="http://schemas.openxmlformats.org/drawingml/2006/main" xmlns:p="http://schemas.openxmlformats.org/presentationml/2006/main" xmlns:r="http://schemas.openxmlformats.org/officeDocument/2006/relationships">
+  <p:cSld>
+    <p:spTree>
+      <p:nvGrpSpPr>
+        <p:cNvPr id="1" name=""/>
+        <p:cNvGrpSpPr/>
+        <p:nvPr/>
+      </p:nvGrpSpPr>
+      <p:grpSpPr/>
+      <p:sp>
+        <p:nvSpPr>
+          <p:cNvPr id="2" name="Rectangle 1"/>
+          <p:cNvSpPr/>
+          <p:nvPr/>
+        </p:nvSpPr>
+        <p:spPr>
+          <a:xfrm>
+            <a:off x="0" y="0"/>
+            <a:ext cx="12191695" cy="1005840"/>
+          </a:xfrm>
+          <a:prstGeom prst="rect">
+            <a:avLst/>
+          </a:prstGeom>
+          <a:solidFill>
+            <a:srgbClr val="C0392B"/>
+          </a:solidFill>
+          <a:ln>
+            <a:noFill/>
+          </a:ln>
+          <a:effectLst/>
+        </p:spPr>
+        <p:style>
+          <a:lnRef idx="1">
+            <a:schemeClr val="accent1"/>
+          </a:lnRef>
+          <a:fillRef idx="3">
+            <a:schemeClr val="accent1"/>
+          </a:fillRef>
+          <a:effectRef idx="2">
+            <a:schemeClr val="accent1"/>
+          </a:effectRef>
+          <a:fontRef idx="minor">
+            <a:schemeClr val="lt1"/>
+          </a:fontRef>
+        </p:style>
+        <p:txBody>
+          <a:bodyPr rtlCol="0" anchor="ctr"/>
+          <a:lstStyle/>
+          <a:p>
+            <a:pPr algn="ctr"/>
+          </a:p>
+        </p:txBody>
+      </p:sp>
+      <p:sp>
+        <p:nvSpPr>
+          <p:cNvPr id="3" name="TextBox 2"/>
+          <p:cNvSpPr txBox="1"/>
+          <p:nvPr/>
+        </p:nvSpPr>
+        <p:spPr>
+          <a:xfrm>
+            <a:off x="548640" y="91440"/>
+            <a:ext cx="10972800" cy="777240"/>
+          </a:xfrm>
+          <a:prstGeom prst="rect">
+            <a:avLst/>
+          </a:prstGeom>
+          <a:noFill/>
+        </p:spPr>
+        <p:txBody>
+          <a:bodyPr wrap="square">
+            <a:spAutoFit/>
+          </a:bodyPr>
+          <a:lstStyle/>
+          <a:p>
+            <a:pPr algn="l">
+              <a:spcAft>
+                <a:spcPts val="600"/>
+              </a:spcAft>
+            </a:pPr>
+            <a:r>
+              <a:rPr sz="2600" b="1">
+                <a:solidFill>
+                  <a:srgbClr val="FFFFFF"/>
+                </a:solidFill>
+                <a:latin typeface="맑은 고딕"/>
+              </a:rPr>
+              <a:t>Broker 가 인식한다</a:t>
+            </a:r>
+          </a:p>
+        </p:txBody>
+      </p:sp>
+      <p:sp>
+        <p:nvSpPr>
+          <p:cNvPr id="4" name="TextBox 3"/>
+          <p:cNvSpPr txBox="1"/>
+          <p:nvPr/>
+        </p:nvSpPr>
+        <p:spPr>
+          <a:xfrm>
+            <a:off x="640080" y="1078992"/>
+            <a:ext cx="10881360" cy="457200"/>
+          </a:xfrm>
+          <a:prstGeom prst="rect">
+            <a:avLst/>
+          </a:prstGeom>
+          <a:noFill/>
+        </p:spPr>
+        <p:txBody>
+          <a:bodyPr wrap="square">
+            <a:spAutoFit/>
+          </a:bodyPr>
+          <a:lstStyle/>
+          <a:p>
+            <a:pPr algn="l">
+              <a:spcAft>
+                <a:spcPts val="600"/>
+              </a:spcAft>
+            </a:pPr>
+            <a:r>
+              <a:rPr sz="1500" b="0">
+                <a:solidFill>
+                  <a:srgbClr val="5A6672"/>
+                </a:solidFill>
+                <a:latin typeface="맑은 고딕"/>
+              </a:rPr>
+              <a:t>SHOW OBSERVER</a:t>
+            </a:r>
+          </a:p>
+        </p:txBody>
+      </p:sp>
+      <p:sp>
+        <p:nvSpPr>
+          <p:cNvPr id="5" name="TextBox 4"/>
+          <p:cNvSpPr txBox="1"/>
+          <p:nvPr/>
+        </p:nvSpPr>
+        <p:spPr>
+          <a:xfrm>
+            <a:off x="640080" y="1737360"/>
+            <a:ext cx="10881360" cy="4754880"/>
+          </a:xfrm>
+          <a:prstGeom prst="rect">
+            <a:avLst/>
+          </a:prstGeom>
+          <a:noFill/>
+        </p:spPr>
+        <p:txBody>
+          <a:bodyPr wrap="square">
+            <a:spAutoFit/>
+          </a:bodyPr>
+          <a:lstStyle/>
           <a:p>
             <a:pPr algn="l">
               <a:spcAft>
@@ -11955,13 +12602,13 @@
               </a:spcAft>
             </a:pPr>
             <a:r>
-              <a:rPr sz="1600" b="0">
+              <a:rPr sz="1700" b="0">
                 <a:solidFill>
                   <a:srgbClr val="222222"/>
                 </a:solidFill>
                 <a:latin typeface="맑은 고딕"/>
               </a:rPr>
-              <a:t>•  **③ 전환은 DGMGRL 로만 한다** (16장의 사고)</a:t>
+              <a:t>•  `Observer: farsync-srv` — **`ORA-16819` 사라짐**</a:t>
             </a:r>
           </a:p>
           <a:p>
@@ -11971,13 +12618,726 @@
               </a:spcAft>
             </a:pPr>
             <a:r>
-              <a:rPr sz="1600" b="0">
+              <a:rPr sz="1700" b="0">
                 <a:solidFill>
                   <a:srgbClr val="222222"/>
                 </a:solidFill>
                 <a:latin typeface="맑은 고딕"/>
               </a:rPr>
-              <a:t>•  그리고 — **되돌리는 것까지가 훈련이다**</a:t>
+              <a:t>•  `Observer "farsync-srv" - Master`</a:t>
+            </a:r>
+          </a:p>
+          <a:p>
+            <a:pPr algn="l">
+              <a:spcAft>
+                <a:spcPts val="1000"/>
+              </a:spcAft>
+            </a:pPr>
+            <a:r>
+              <a:rPr sz="1700" b="0">
+                <a:solidFill>
+                  <a:srgbClr val="222222"/>
+                </a:solidFill>
+                <a:latin typeface="맑은 고딕"/>
+              </a:rPr>
+              <a:t>•  `Last Ping to Primary: 2 seconds ago`</a:t>
+            </a:r>
+          </a:p>
+          <a:p>
+            <a:pPr algn="l">
+              <a:spcAft>
+                <a:spcPts val="1000"/>
+              </a:spcAft>
+            </a:pPr>
+            <a:r>
+              <a:rPr sz="1700" b="0">
+                <a:solidFill>
+                  <a:srgbClr val="222222"/>
+                </a:solidFill>
+                <a:latin typeface="맑은 고딕"/>
+              </a:rPr>
+              <a:t>•  `Last Ping to Target: 2 seconds ago`</a:t>
+            </a:r>
+          </a:p>
+        </p:txBody>
+      </p:sp>
+    </p:spTree>
+  </p:cSld>
+  <p:clrMapOvr>
+    <a:masterClrMapping/>
+  </p:clrMapOvr>
+</p:sld>
+</file>
+
+<file path=ppt/slides/slide37.xml><?xml version="1.0" encoding="utf-8"?>
+<p:sld xmlns:a="http://schemas.openxmlformats.org/drawingml/2006/main" xmlns:p="http://schemas.openxmlformats.org/presentationml/2006/main" xmlns:r="http://schemas.openxmlformats.org/officeDocument/2006/relationships">
+  <p:cSld>
+    <p:spTree>
+      <p:nvGrpSpPr>
+        <p:cNvPr id="1" name=""/>
+        <p:cNvGrpSpPr/>
+        <p:nvPr/>
+      </p:nvGrpSpPr>
+      <p:grpSpPr/>
+      <p:sp>
+        <p:nvSpPr>
+          <p:cNvPr id="2" name="Rectangle 1"/>
+          <p:cNvSpPr/>
+          <p:nvPr/>
+        </p:nvSpPr>
+        <p:spPr>
+          <a:xfrm>
+            <a:off x="0" y="0"/>
+            <a:ext cx="12191695" cy="1005840"/>
+          </a:xfrm>
+          <a:prstGeom prst="rect">
+            <a:avLst/>
+          </a:prstGeom>
+          <a:solidFill>
+            <a:srgbClr val="C0392B"/>
+          </a:solidFill>
+          <a:ln>
+            <a:noFill/>
+          </a:ln>
+          <a:effectLst/>
+        </p:spPr>
+        <p:style>
+          <a:lnRef idx="1">
+            <a:schemeClr val="accent1"/>
+          </a:lnRef>
+          <a:fillRef idx="3">
+            <a:schemeClr val="accent1"/>
+          </a:fillRef>
+          <a:effectRef idx="2">
+            <a:schemeClr val="accent1"/>
+          </a:effectRef>
+          <a:fontRef idx="minor">
+            <a:schemeClr val="lt1"/>
+          </a:fontRef>
+        </p:style>
+        <p:txBody>
+          <a:bodyPr rtlCol="0" anchor="ctr"/>
+          <a:lstStyle/>
+          <a:p>
+            <a:pPr algn="ctr"/>
+          </a:p>
+        </p:txBody>
+      </p:sp>
+      <p:sp>
+        <p:nvSpPr>
+          <p:cNvPr id="3" name="TextBox 2"/>
+          <p:cNvSpPr txBox="1"/>
+          <p:nvPr/>
+        </p:nvSpPr>
+        <p:spPr>
+          <a:xfrm>
+            <a:off x="548640" y="91440"/>
+            <a:ext cx="10972800" cy="777240"/>
+          </a:xfrm>
+          <a:prstGeom prst="rect">
+            <a:avLst/>
+          </a:prstGeom>
+          <a:noFill/>
+        </p:spPr>
+        <p:txBody>
+          <a:bodyPr wrap="square">
+            <a:spAutoFit/>
+          </a:bodyPr>
+          <a:lstStyle/>
+          <a:p>
+            <a:pPr algn="l">
+              <a:spcAft>
+                <a:spcPts val="600"/>
+              </a:spcAft>
+            </a:pPr>
+            <a:r>
+              <a:rPr sz="2600" b="1">
+                <a:solidFill>
+                  <a:srgbClr val="FFFFFF"/>
+                </a:solidFill>
+                <a:latin typeface="맑은 고딕"/>
+              </a:rPr>
+              <a:t>명령 없이 일어나는 전환</a:t>
+            </a:r>
+          </a:p>
+        </p:txBody>
+      </p:sp>
+      <p:sp>
+        <p:nvSpPr>
+          <p:cNvPr id="4" name="TextBox 3"/>
+          <p:cNvSpPr txBox="1"/>
+          <p:nvPr/>
+        </p:nvSpPr>
+        <p:spPr>
+          <a:xfrm>
+            <a:off x="640080" y="1078992"/>
+            <a:ext cx="10881360" cy="457200"/>
+          </a:xfrm>
+          <a:prstGeom prst="rect">
+            <a:avLst/>
+          </a:prstGeom>
+          <a:noFill/>
+        </p:spPr>
+        <p:txBody>
+          <a:bodyPr wrap="square">
+            <a:spAutoFit/>
+          </a:bodyPr>
+          <a:lstStyle/>
+          <a:p>
+            <a:pPr algn="l">
+              <a:spcAft>
+                <a:spcPts val="600"/>
+              </a:spcAft>
+            </a:pPr>
+            <a:r>
+              <a:rPr sz="1500" b="0">
+                <a:solidFill>
+                  <a:srgbClr val="5A6672"/>
+                </a:solidFill>
+                <a:latin typeface="맑은 고딕"/>
+              </a:rPr>
+              <a:t>69초</a:t>
+            </a:r>
+          </a:p>
+        </p:txBody>
+      </p:sp>
+      <p:sp>
+        <p:nvSpPr>
+          <p:cNvPr id="5" name="TextBox 4"/>
+          <p:cNvSpPr txBox="1"/>
+          <p:nvPr/>
+        </p:nvSpPr>
+        <p:spPr>
+          <a:xfrm>
+            <a:off x="640080" y="1737360"/>
+            <a:ext cx="10881360" cy="4754880"/>
+          </a:xfrm>
+          <a:prstGeom prst="rect">
+            <a:avLst/>
+          </a:prstGeom>
+          <a:noFill/>
+        </p:spPr>
+        <p:txBody>
+          <a:bodyPr wrap="square">
+            <a:spAutoFit/>
+          </a:bodyPr>
+          <a:lstStyle/>
+          <a:p>
+            <a:pPr algn="l">
+              <a:spcAft>
+                <a:spcPts val="1000"/>
+              </a:spcAft>
+            </a:pPr>
+            <a:r>
+              <a:rPr sz="1700" b="0">
+                <a:solidFill>
+                  <a:srgbClr val="222222"/>
+                </a:solidFill>
+                <a:latin typeface="맑은 고딕"/>
+              </a:rPr>
+              <a:t>•  `shutdown abort` 후 **아무 명령도 내리지 않는다**</a:t>
+            </a:r>
+          </a:p>
+          <a:p>
+            <a:pPr algn="l">
+              <a:spcAft>
+                <a:spcPts val="1000"/>
+              </a:spcAft>
+            </a:pPr>
+            <a:r>
+              <a:rPr sz="1700" b="0">
+                <a:solidFill>
+                  <a:srgbClr val="222222"/>
+                </a:solidFill>
+                <a:latin typeface="맑은 고딕"/>
+              </a:rPr>
+              <a:t>•  21초 / 37초 — 아직 Standby</a:t>
+            </a:r>
+          </a:p>
+          <a:p>
+            <a:pPr algn="l">
+              <a:spcAft>
+                <a:spcPts val="1000"/>
+              </a:spcAft>
+            </a:pPr>
+            <a:r>
+              <a:rPr sz="1700" b="0">
+                <a:solidFill>
+                  <a:srgbClr val="222222"/>
+                </a:solidFill>
+                <a:latin typeface="맑은 고딕"/>
+              </a:rPr>
+              <a:t>•  53초 — **`MOUNTED`** (전환 중)</a:t>
+            </a:r>
+          </a:p>
+          <a:p>
+            <a:pPr algn="l">
+              <a:spcAft>
+                <a:spcPts val="1000"/>
+              </a:spcAft>
+            </a:pPr>
+            <a:r>
+              <a:rPr sz="1700" b="0">
+                <a:solidFill>
+                  <a:srgbClr val="222222"/>
+                </a:solidFill>
+                <a:latin typeface="맑은 고딕"/>
+              </a:rPr>
+              <a:t>•  69초 — **`PRIMARY / READ WRITE`**</a:t>
+            </a:r>
+          </a:p>
+        </p:txBody>
+      </p:sp>
+    </p:spTree>
+  </p:cSld>
+  <p:clrMapOvr>
+    <a:masterClrMapping/>
+  </p:clrMapOvr>
+</p:sld>
+</file>
+
+<file path=ppt/slides/slide38.xml><?xml version="1.0" encoding="utf-8"?>
+<p:sld xmlns:a="http://schemas.openxmlformats.org/drawingml/2006/main" xmlns:p="http://schemas.openxmlformats.org/presentationml/2006/main" xmlns:r="http://schemas.openxmlformats.org/officeDocument/2006/relationships">
+  <p:cSld>
+    <p:spTree>
+      <p:nvGrpSpPr>
+        <p:cNvPr id="1" name=""/>
+        <p:cNvGrpSpPr/>
+        <p:nvPr/>
+      </p:nvGrpSpPr>
+      <p:grpSpPr/>
+      <p:sp>
+        <p:nvSpPr>
+          <p:cNvPr id="2" name="Rectangle 1"/>
+          <p:cNvSpPr/>
+          <p:nvPr/>
+        </p:nvSpPr>
+        <p:spPr>
+          <a:xfrm>
+            <a:off x="0" y="0"/>
+            <a:ext cx="12191695" cy="1005840"/>
+          </a:xfrm>
+          <a:prstGeom prst="rect">
+            <a:avLst/>
+          </a:prstGeom>
+          <a:solidFill>
+            <a:srgbClr val="C0392B"/>
+          </a:solidFill>
+          <a:ln>
+            <a:noFill/>
+          </a:ln>
+          <a:effectLst/>
+        </p:spPr>
+        <p:style>
+          <a:lnRef idx="1">
+            <a:schemeClr val="accent1"/>
+          </a:lnRef>
+          <a:fillRef idx="3">
+            <a:schemeClr val="accent1"/>
+          </a:fillRef>
+          <a:effectRef idx="2">
+            <a:schemeClr val="accent1"/>
+          </a:effectRef>
+          <a:fontRef idx="minor">
+            <a:schemeClr val="lt1"/>
+          </a:fontRef>
+        </p:style>
+        <p:txBody>
+          <a:bodyPr rtlCol="0" anchor="ctr"/>
+          <a:lstStyle/>
+          <a:p>
+            <a:pPr algn="ctr"/>
+          </a:p>
+        </p:txBody>
+      </p:sp>
+      <p:sp>
+        <p:nvSpPr>
+          <p:cNvPr id="3" name="TextBox 2"/>
+          <p:cNvSpPr txBox="1"/>
+          <p:nvPr/>
+        </p:nvSpPr>
+        <p:spPr>
+          <a:xfrm>
+            <a:off x="548640" y="91440"/>
+            <a:ext cx="10972800" cy="777240"/>
+          </a:xfrm>
+          <a:prstGeom prst="rect">
+            <a:avLst/>
+          </a:prstGeom>
+          <a:noFill/>
+        </p:spPr>
+        <p:txBody>
+          <a:bodyPr wrap="square">
+            <a:spAutoFit/>
+          </a:bodyPr>
+          <a:lstStyle/>
+          <a:p>
+            <a:pPr algn="l">
+              <a:spcAft>
+                <a:spcPts val="600"/>
+              </a:spcAft>
+            </a:pPr>
+            <a:r>
+              <a:rPr sz="2600" b="1">
+                <a:solidFill>
+                  <a:srgbClr val="FFFFFF"/>
+                </a:solidFill>
+                <a:latin typeface="맑은 고딕"/>
+              </a:rPr>
+              <a:t>관측자는 한 번 거부한다</a:t>
+            </a:r>
+          </a:p>
+        </p:txBody>
+      </p:sp>
+      <p:sp>
+        <p:nvSpPr>
+          <p:cNvPr id="4" name="TextBox 3"/>
+          <p:cNvSpPr txBox="1"/>
+          <p:nvPr/>
+        </p:nvSpPr>
+        <p:spPr>
+          <a:xfrm>
+            <a:off x="640080" y="1078992"/>
+            <a:ext cx="10881360" cy="457200"/>
+          </a:xfrm>
+          <a:prstGeom prst="rect">
+            <a:avLst/>
+          </a:prstGeom>
+          <a:noFill/>
+        </p:spPr>
+        <p:txBody>
+          <a:bodyPr wrap="square">
+            <a:spAutoFit/>
+          </a:bodyPr>
+          <a:lstStyle/>
+          <a:p>
+            <a:pPr algn="l">
+              <a:spcAft>
+                <a:spcPts val="600"/>
+              </a:spcAft>
+            </a:pPr>
+            <a:r>
+              <a:rPr sz="1500" b="0">
+                <a:solidFill>
+                  <a:srgbClr val="5A6672"/>
+                </a:solidFill>
+                <a:latin typeface="맑은 고딕"/>
+              </a:rPr>
+              <a:t>split brain 방지</a:t>
+            </a:r>
+          </a:p>
+        </p:txBody>
+      </p:sp>
+      <p:sp>
+        <p:nvSpPr>
+          <p:cNvPr id="5" name="TextBox 4"/>
+          <p:cNvSpPr txBox="1"/>
+          <p:nvPr/>
+        </p:nvSpPr>
+        <p:spPr>
+          <a:xfrm>
+            <a:off x="640080" y="1737360"/>
+            <a:ext cx="10881360" cy="4754880"/>
+          </a:xfrm>
+          <a:prstGeom prst="rect">
+            <a:avLst/>
+          </a:prstGeom>
+          <a:noFill/>
+        </p:spPr>
+        <p:txBody>
+          <a:bodyPr wrap="square">
+            <a:spAutoFit/>
+          </a:bodyPr>
+          <a:lstStyle/>
+          <a:p>
+            <a:pPr algn="l">
+              <a:spcAft>
+                <a:spcPts val="1000"/>
+              </a:spcAft>
+            </a:pPr>
+            <a:r>
+              <a:rPr sz="1700" b="0">
+                <a:solidFill>
+                  <a:srgbClr val="222222"/>
+                </a:solidFill>
+                <a:latin typeface="맑은 고딕"/>
+              </a:rPr>
+              <a:t>•  `threshold has not exceeded. Retry for the next 3 seconds`</a:t>
+            </a:r>
+          </a:p>
+          <a:p>
+            <a:pPr algn="l">
+              <a:spcAft>
+                <a:spcPts val="1000"/>
+              </a:spcAft>
+            </a:pPr>
+            <a:r>
+              <a:rPr sz="1700" b="0">
+                <a:solidFill>
+                  <a:srgbClr val="222222"/>
+                </a:solidFill>
+                <a:latin typeface="맑은 고딕"/>
+              </a:rPr>
+              <a:t>•  `threshold has expired.` → `Making a last connection attempt`</a:t>
+            </a:r>
+          </a:p>
+          <a:p>
+            <a:pPr algn="l">
+              <a:spcAft>
+                <a:spcPts val="1000"/>
+              </a:spcAft>
+            </a:pPr>
+            <a:r>
+              <a:rPr sz="1700" b="0">
+                <a:solidFill>
+                  <a:srgbClr val="222222"/>
+                </a:solidFill>
+                <a:latin typeface="맑은 고딕"/>
+              </a:rPr>
+              <a:t>•  **`not possible because primary last contacted the standby`**</a:t>
+            </a:r>
+          </a:p>
+          <a:p>
+            <a:pPr algn="l">
+              <a:spcAft>
+                <a:spcPts val="1000"/>
+              </a:spcAft>
+            </a:pPr>
+            <a:r>
+              <a:rPr sz="1700" b="0">
+                <a:solidFill>
+                  <a:srgbClr val="222222"/>
+                </a:solidFill>
+                <a:latin typeface="맑은 고딕"/>
+              </a:rPr>
+              <a:t>•  `Failed to ping the primary.` → `Fast-Start Failover started...`</a:t>
+            </a:r>
+          </a:p>
+        </p:txBody>
+      </p:sp>
+    </p:spTree>
+  </p:cSld>
+  <p:clrMapOvr>
+    <a:masterClrMapping/>
+  </p:clrMapOvr>
+</p:sld>
+</file>
+
+<file path=ppt/slides/slide39.xml><?xml version="1.0" encoding="utf-8"?>
+<p:sld xmlns:a="http://schemas.openxmlformats.org/drawingml/2006/main" xmlns:p="http://schemas.openxmlformats.org/presentationml/2006/main" xmlns:r="http://schemas.openxmlformats.org/officeDocument/2006/relationships">
+  <p:cSld>
+    <p:spTree>
+      <p:nvGrpSpPr>
+        <p:cNvPr id="1" name=""/>
+        <p:cNvGrpSpPr/>
+        <p:nvPr/>
+      </p:nvGrpSpPr>
+      <p:grpSpPr/>
+      <p:sp>
+        <p:nvSpPr>
+          <p:cNvPr id="2" name="Rectangle 1"/>
+          <p:cNvSpPr/>
+          <p:nvPr/>
+        </p:nvSpPr>
+        <p:spPr>
+          <a:xfrm>
+            <a:off x="0" y="0"/>
+            <a:ext cx="12191695" cy="1005840"/>
+          </a:xfrm>
+          <a:prstGeom prst="rect">
+            <a:avLst/>
+          </a:prstGeom>
+          <a:solidFill>
+            <a:srgbClr val="C0392B"/>
+          </a:solidFill>
+          <a:ln>
+            <a:noFill/>
+          </a:ln>
+          <a:effectLst/>
+        </p:spPr>
+        <p:style>
+          <a:lnRef idx="1">
+            <a:schemeClr val="accent1"/>
+          </a:lnRef>
+          <a:fillRef idx="3">
+            <a:schemeClr val="accent1"/>
+          </a:fillRef>
+          <a:effectRef idx="2">
+            <a:schemeClr val="accent1"/>
+          </a:effectRef>
+          <a:fontRef idx="minor">
+            <a:schemeClr val="lt1"/>
+          </a:fontRef>
+        </p:style>
+        <p:txBody>
+          <a:bodyPr rtlCol="0" anchor="ctr"/>
+          <a:lstStyle/>
+          <a:p>
+            <a:pPr algn="ctr"/>
+          </a:p>
+        </p:txBody>
+      </p:sp>
+      <p:sp>
+        <p:nvSpPr>
+          <p:cNvPr id="3" name="TextBox 2"/>
+          <p:cNvSpPr txBox="1"/>
+          <p:nvPr/>
+        </p:nvSpPr>
+        <p:spPr>
+          <a:xfrm>
+            <a:off x="548640" y="91440"/>
+            <a:ext cx="10972800" cy="777240"/>
+          </a:xfrm>
+          <a:prstGeom prst="rect">
+            <a:avLst/>
+          </a:prstGeom>
+          <a:noFill/>
+        </p:spPr>
+        <p:txBody>
+          <a:bodyPr wrap="square">
+            <a:spAutoFit/>
+          </a:bodyPr>
+          <a:lstStyle/>
+          <a:p>
+            <a:pPr algn="l">
+              <a:spcAft>
+                <a:spcPts val="600"/>
+              </a:spcAft>
+            </a:pPr>
+            <a:r>
+              <a:rPr sz="2600" b="1">
+                <a:solidFill>
+                  <a:srgbClr val="FFFFFF"/>
+                </a:solidFill>
+                <a:latin typeface="맑은 고딕"/>
+              </a:rPr>
+              <a:t>자동 재편입</a:t>
+            </a:r>
+          </a:p>
+        </p:txBody>
+      </p:sp>
+      <p:sp>
+        <p:nvSpPr>
+          <p:cNvPr id="4" name="TextBox 3"/>
+          <p:cNvSpPr txBox="1"/>
+          <p:nvPr/>
+        </p:nvSpPr>
+        <p:spPr>
+          <a:xfrm>
+            <a:off x="640080" y="1078992"/>
+            <a:ext cx="10881360" cy="457200"/>
+          </a:xfrm>
+          <a:prstGeom prst="rect">
+            <a:avLst/>
+          </a:prstGeom>
+          <a:noFill/>
+        </p:spPr>
+        <p:txBody>
+          <a:bodyPr wrap="square">
+            <a:spAutoFit/>
+          </a:bodyPr>
+          <a:lstStyle/>
+          <a:p>
+            <a:pPr algn="l">
+              <a:spcAft>
+                <a:spcPts val="600"/>
+              </a:spcAft>
+            </a:pPr>
+            <a:r>
+              <a:rPr sz="1500" b="0">
+                <a:solidFill>
+                  <a:srgbClr val="5A6672"/>
+                </a:solidFill>
+                <a:latin typeface="맑은 고딕"/>
+              </a:rPr>
+              <a:t>42초</a:t>
+            </a:r>
+          </a:p>
+        </p:txBody>
+      </p:sp>
+      <p:sp>
+        <p:nvSpPr>
+          <p:cNvPr id="5" name="TextBox 4"/>
+          <p:cNvSpPr txBox="1"/>
+          <p:nvPr/>
+        </p:nvSpPr>
+        <p:spPr>
+          <a:xfrm>
+            <a:off x="640080" y="1737360"/>
+            <a:ext cx="10881360" cy="4754880"/>
+          </a:xfrm>
+          <a:prstGeom prst="rect">
+            <a:avLst/>
+          </a:prstGeom>
+          <a:noFill/>
+        </p:spPr>
+        <p:txBody>
+          <a:bodyPr wrap="square">
+            <a:spAutoFit/>
+          </a:bodyPr>
+          <a:lstStyle/>
+          <a:p>
+            <a:pPr algn="l">
+              <a:spcAft>
+                <a:spcPts val="1000"/>
+              </a:spcAft>
+            </a:pPr>
+            <a:r>
+              <a:rPr sz="1700" b="0">
+                <a:solidFill>
+                  <a:srgbClr val="222222"/>
+                </a:solidFill>
+                <a:latin typeface="맑은 고딕"/>
+              </a:rPr>
+              <a:t>•  옛 Primary 를 **`MOUNT` 까지만** 올린다</a:t>
+            </a:r>
+          </a:p>
+          <a:p>
+            <a:pPr algn="l">
+              <a:spcAft>
+                <a:spcPts val="1000"/>
+              </a:spcAft>
+            </a:pPr>
+            <a:r>
+              <a:rPr sz="1700" b="0">
+                <a:solidFill>
+                  <a:srgbClr val="222222"/>
+                </a:solidFill>
+                <a:latin typeface="맑은 고딕"/>
+              </a:rPr>
+              <a:t>•  `The standby chicago needs to be reinstated`</a:t>
+            </a:r>
+          </a:p>
+          <a:p>
+            <a:pPr algn="l">
+              <a:spcAft>
+                <a:spcPts val="1000"/>
+              </a:spcAft>
+            </a:pPr>
+            <a:r>
+              <a:rPr sz="1700" b="0">
+                <a:solidFill>
+                  <a:srgbClr val="222222"/>
+                </a:solidFill>
+                <a:latin typeface="맑은 고딕"/>
+              </a:rPr>
+              <a:t>•  `New primary is now ready to reinstate.` → `Issuing REINSTATE command.`</a:t>
+            </a:r>
+          </a:p>
+          <a:p>
+            <a:pPr algn="l">
+              <a:spcAft>
+                <a:spcPts val="1000"/>
+              </a:spcAft>
+            </a:pPr>
+            <a:r>
+              <a:rPr sz="1700" b="0">
+                <a:solidFill>
+                  <a:srgbClr val="222222"/>
+                </a:solidFill>
+                <a:latin typeface="맑은 고딕"/>
+              </a:rPr>
+              <a:t>•  재편입 직후에는 아직 **`MOUNTED`** — 적용 시작은 다음 단계</a:t>
             </a:r>
           </a:p>
         </p:txBody>
@@ -12217,6 +13577,1558 @@
                 <a:latin typeface="맑은 고딕"/>
               </a:rPr>
               <a:t>•  손실 여부가 핵심</a:t>
+            </a:r>
+          </a:p>
+        </p:txBody>
+      </p:sp>
+    </p:spTree>
+  </p:cSld>
+  <p:clrMapOvr>
+    <a:masterClrMapping/>
+  </p:clrMapOvr>
+</p:sld>
+</file>
+
+<file path=ppt/slides/slide40.xml><?xml version="1.0" encoding="utf-8"?>
+<p:sld xmlns:a="http://schemas.openxmlformats.org/drawingml/2006/main" xmlns:p="http://schemas.openxmlformats.org/presentationml/2006/main" xmlns:r="http://schemas.openxmlformats.org/officeDocument/2006/relationships">
+  <p:cSld>
+    <p:spTree>
+      <p:nvGrpSpPr>
+        <p:cNvPr id="1" name=""/>
+        <p:cNvGrpSpPr/>
+        <p:nvPr/>
+      </p:nvGrpSpPr>
+      <p:grpSpPr/>
+      <p:sp>
+        <p:nvSpPr>
+          <p:cNvPr id="2" name="Rectangle 1"/>
+          <p:cNvSpPr/>
+          <p:nvPr/>
+        </p:nvSpPr>
+        <p:spPr>
+          <a:xfrm>
+            <a:off x="0" y="0"/>
+            <a:ext cx="12191695" cy="6858000"/>
+          </a:xfrm>
+          <a:prstGeom prst="rect">
+            <a:avLst/>
+          </a:prstGeom>
+          <a:solidFill>
+            <a:srgbClr val="C0392B"/>
+          </a:solidFill>
+          <a:ln>
+            <a:noFill/>
+          </a:ln>
+          <a:effectLst/>
+        </p:spPr>
+        <p:style>
+          <a:lnRef idx="1">
+            <a:schemeClr val="accent1"/>
+          </a:lnRef>
+          <a:fillRef idx="3">
+            <a:schemeClr val="accent1"/>
+          </a:fillRef>
+          <a:effectRef idx="2">
+            <a:schemeClr val="accent1"/>
+          </a:effectRef>
+          <a:fontRef idx="minor">
+            <a:schemeClr val="lt1"/>
+          </a:fontRef>
+        </p:style>
+        <p:txBody>
+          <a:bodyPr rtlCol="0" anchor="ctr"/>
+          <a:lstStyle/>
+          <a:p>
+            <a:pPr algn="ctr"/>
+          </a:p>
+        </p:txBody>
+      </p:sp>
+      <p:sp>
+        <p:nvSpPr>
+          <p:cNvPr id="3" name="TextBox 2"/>
+          <p:cNvSpPr txBox="1"/>
+          <p:nvPr/>
+        </p:nvSpPr>
+        <p:spPr>
+          <a:xfrm>
+            <a:off x="822960" y="2011680"/>
+            <a:ext cx="10515600" cy="1097280"/>
+          </a:xfrm>
+          <a:prstGeom prst="rect">
+            <a:avLst/>
+          </a:prstGeom>
+          <a:noFill/>
+        </p:spPr>
+        <p:txBody>
+          <a:bodyPr wrap="square">
+            <a:spAutoFit/>
+          </a:bodyPr>
+          <a:lstStyle/>
+          <a:p>
+            <a:pPr algn="l">
+              <a:spcAft>
+                <a:spcPts val="600"/>
+              </a:spcAft>
+            </a:pPr>
+            <a:r>
+              <a:rPr sz="4000" b="1">
+                <a:solidFill>
+                  <a:srgbClr val="FFFFFF"/>
+                </a:solidFill>
+                <a:latin typeface="맑은 고딕"/>
+              </a:rPr>
+              <a:t>16.11</a:t>
+            </a:r>
+          </a:p>
+        </p:txBody>
+      </p:sp>
+      <p:sp>
+        <p:nvSpPr>
+          <p:cNvPr id="4" name="TextBox 3"/>
+          <p:cNvSpPr txBox="1"/>
+          <p:nvPr/>
+        </p:nvSpPr>
+        <p:spPr>
+          <a:xfrm>
+            <a:off x="822960" y="3017520"/>
+            <a:ext cx="10515600" cy="914400"/>
+          </a:xfrm>
+          <a:prstGeom prst="rect">
+            <a:avLst/>
+          </a:prstGeom>
+          <a:noFill/>
+        </p:spPr>
+        <p:txBody>
+          <a:bodyPr wrap="square">
+            <a:spAutoFit/>
+          </a:bodyPr>
+          <a:lstStyle/>
+          <a:p>
+            <a:pPr algn="l">
+              <a:spcAft>
+                <a:spcPts val="600"/>
+              </a:spcAft>
+            </a:pPr>
+            <a:r>
+              <a:rPr sz="2800" b="1">
+                <a:solidFill>
+                  <a:srgbClr val="FFFFFF"/>
+                </a:solidFill>
+                <a:latin typeface="맑은 고딕"/>
+              </a:rPr>
+              <a:t>Standby 를 백업에 활용한다</a:t>
+            </a:r>
+          </a:p>
+        </p:txBody>
+      </p:sp>
+      <p:sp>
+        <p:nvSpPr>
+          <p:cNvPr id="5" name="Rectangle 4"/>
+          <p:cNvSpPr/>
+          <p:nvPr/>
+        </p:nvSpPr>
+        <p:spPr>
+          <a:xfrm>
+            <a:off x="822960" y="4114800"/>
+            <a:ext cx="5486400" cy="54864"/>
+          </a:xfrm>
+          <a:prstGeom prst="rect">
+            <a:avLst/>
+          </a:prstGeom>
+          <a:solidFill>
+            <a:srgbClr val="FFFFFF"/>
+          </a:solidFill>
+          <a:ln>
+            <a:noFill/>
+          </a:ln>
+          <a:effectLst/>
+        </p:spPr>
+        <p:style>
+          <a:lnRef idx="1">
+            <a:schemeClr val="accent1"/>
+          </a:lnRef>
+          <a:fillRef idx="3">
+            <a:schemeClr val="accent1"/>
+          </a:fillRef>
+          <a:effectRef idx="2">
+            <a:schemeClr val="accent1"/>
+          </a:effectRef>
+          <a:fontRef idx="minor">
+            <a:schemeClr val="lt1"/>
+          </a:fontRef>
+        </p:style>
+        <p:txBody>
+          <a:bodyPr rtlCol="0" anchor="ctr"/>
+          <a:lstStyle/>
+          <a:p>
+            <a:pPr algn="ctr"/>
+          </a:p>
+        </p:txBody>
+      </p:sp>
+      <p:sp>
+        <p:nvSpPr>
+          <p:cNvPr id="6" name="TextBox 5"/>
+          <p:cNvSpPr txBox="1"/>
+          <p:nvPr/>
+        </p:nvSpPr>
+        <p:spPr>
+          <a:xfrm>
+            <a:off x="822960" y="4297680"/>
+            <a:ext cx="10058400" cy="2011680"/>
+          </a:xfrm>
+          <a:prstGeom prst="rect">
+            <a:avLst/>
+          </a:prstGeom>
+          <a:noFill/>
+        </p:spPr>
+        <p:txBody>
+          <a:bodyPr wrap="square">
+            <a:spAutoFit/>
+          </a:bodyPr>
+          <a:lstStyle/>
+          <a:p>
+            <a:pPr algn="l">
+              <a:spcAft>
+                <a:spcPts val="800"/>
+              </a:spcAft>
+            </a:pPr>
+            <a:r>
+              <a:rPr sz="1600" b="0">
+                <a:solidFill>
+                  <a:srgbClr val="FFFFFF"/>
+                </a:solidFill>
+                <a:latin typeface="맑은 고딕"/>
+              </a:rPr>
+              <a:t>•  받을 수는 있다</a:t>
+            </a:r>
+          </a:p>
+          <a:p>
+            <a:pPr algn="l">
+              <a:spcAft>
+                <a:spcPts val="800"/>
+              </a:spcAft>
+            </a:pPr>
+            <a:r>
+              <a:rPr sz="1600" b="0">
+                <a:solidFill>
+                  <a:srgbClr val="FFFFFF"/>
+                </a:solidFill>
+                <a:latin typeface="맑은 고딕"/>
+              </a:rPr>
+              <a:t>•  그런데 보이지 않는다</a:t>
+            </a:r>
+          </a:p>
+        </p:txBody>
+      </p:sp>
+    </p:spTree>
+  </p:cSld>
+  <p:clrMapOvr>
+    <a:masterClrMapping/>
+  </p:clrMapOvr>
+</p:sld>
+</file>
+
+<file path=ppt/slides/slide41.xml><?xml version="1.0" encoding="utf-8"?>
+<p:sld xmlns:a="http://schemas.openxmlformats.org/drawingml/2006/main" xmlns:p="http://schemas.openxmlformats.org/presentationml/2006/main" xmlns:r="http://schemas.openxmlformats.org/officeDocument/2006/relationships">
+  <p:cSld>
+    <p:spTree>
+      <p:nvGrpSpPr>
+        <p:cNvPr id="1" name=""/>
+        <p:cNvGrpSpPr/>
+        <p:nvPr/>
+      </p:nvGrpSpPr>
+      <p:grpSpPr/>
+      <p:sp>
+        <p:nvSpPr>
+          <p:cNvPr id="2" name="Rectangle 1"/>
+          <p:cNvSpPr/>
+          <p:nvPr/>
+        </p:nvSpPr>
+        <p:spPr>
+          <a:xfrm>
+            <a:off x="0" y="0"/>
+            <a:ext cx="12191695" cy="1005840"/>
+          </a:xfrm>
+          <a:prstGeom prst="rect">
+            <a:avLst/>
+          </a:prstGeom>
+          <a:solidFill>
+            <a:srgbClr val="C0392B"/>
+          </a:solidFill>
+          <a:ln>
+            <a:noFill/>
+          </a:ln>
+          <a:effectLst/>
+        </p:spPr>
+        <p:style>
+          <a:lnRef idx="1">
+            <a:schemeClr val="accent1"/>
+          </a:lnRef>
+          <a:fillRef idx="3">
+            <a:schemeClr val="accent1"/>
+          </a:fillRef>
+          <a:effectRef idx="2">
+            <a:schemeClr val="accent1"/>
+          </a:effectRef>
+          <a:fontRef idx="minor">
+            <a:schemeClr val="lt1"/>
+          </a:fontRef>
+        </p:style>
+        <p:txBody>
+          <a:bodyPr rtlCol="0" anchor="ctr"/>
+          <a:lstStyle/>
+          <a:p>
+            <a:pPr algn="ctr"/>
+          </a:p>
+        </p:txBody>
+      </p:sp>
+      <p:sp>
+        <p:nvSpPr>
+          <p:cNvPr id="3" name="TextBox 2"/>
+          <p:cNvSpPr txBox="1"/>
+          <p:nvPr/>
+        </p:nvSpPr>
+        <p:spPr>
+          <a:xfrm>
+            <a:off x="548640" y="91440"/>
+            <a:ext cx="10972800" cy="777240"/>
+          </a:xfrm>
+          <a:prstGeom prst="rect">
+            <a:avLst/>
+          </a:prstGeom>
+          <a:noFill/>
+        </p:spPr>
+        <p:txBody>
+          <a:bodyPr wrap="square">
+            <a:spAutoFit/>
+          </a:bodyPr>
+          <a:lstStyle/>
+          <a:p>
+            <a:pPr algn="l">
+              <a:spcAft>
+                <a:spcPts val="600"/>
+              </a:spcAft>
+            </a:pPr>
+            <a:r>
+              <a:rPr sz="2600" b="1">
+                <a:solidFill>
+                  <a:srgbClr val="FFFFFF"/>
+                </a:solidFill>
+                <a:latin typeface="맑은 고딕"/>
+              </a:rPr>
+              <a:t>Standby 에서 백업</a:t>
+            </a:r>
+          </a:p>
+        </p:txBody>
+      </p:sp>
+      <p:sp>
+        <p:nvSpPr>
+          <p:cNvPr id="4" name="TextBox 3"/>
+          <p:cNvSpPr txBox="1"/>
+          <p:nvPr/>
+        </p:nvSpPr>
+        <p:spPr>
+          <a:xfrm>
+            <a:off x="640080" y="1078992"/>
+            <a:ext cx="10881360" cy="457200"/>
+          </a:xfrm>
+          <a:prstGeom prst="rect">
+            <a:avLst/>
+          </a:prstGeom>
+          <a:noFill/>
+        </p:spPr>
+        <p:txBody>
+          <a:bodyPr wrap="square">
+            <a:spAutoFit/>
+          </a:bodyPr>
+          <a:lstStyle/>
+          <a:p>
+            <a:pPr algn="l">
+              <a:spcAft>
+                <a:spcPts val="600"/>
+              </a:spcAft>
+            </a:pPr>
+            <a:r>
+              <a:rPr sz="1500" b="0">
+                <a:solidFill>
+                  <a:srgbClr val="5A6672"/>
+                </a:solidFill>
+                <a:latin typeface="맑은 고딕"/>
+              </a:rPr>
+              <a:t>열린 채로 된다</a:t>
+            </a:r>
+          </a:p>
+        </p:txBody>
+      </p:sp>
+      <p:sp>
+        <p:nvSpPr>
+          <p:cNvPr id="5" name="TextBox 4"/>
+          <p:cNvSpPr txBox="1"/>
+          <p:nvPr/>
+        </p:nvSpPr>
+        <p:spPr>
+          <a:xfrm>
+            <a:off x="640080" y="1737360"/>
+            <a:ext cx="10881360" cy="4754880"/>
+          </a:xfrm>
+          <a:prstGeom prst="rect">
+            <a:avLst/>
+          </a:prstGeom>
+          <a:noFill/>
+        </p:spPr>
+        <p:txBody>
+          <a:bodyPr wrap="square">
+            <a:spAutoFit/>
+          </a:bodyPr>
+          <a:lstStyle/>
+          <a:p>
+            <a:pPr algn="l">
+              <a:spcAft>
+                <a:spcPts val="1000"/>
+              </a:spcAft>
+            </a:pPr>
+            <a:r>
+              <a:rPr sz="1700" b="0">
+                <a:solidFill>
+                  <a:srgbClr val="222222"/>
+                </a:solidFill>
+                <a:latin typeface="맑은 고딕"/>
+              </a:rPr>
+              <a:t>•  양쪽 **DBID 동일** (1852041610)</a:t>
+            </a:r>
+          </a:p>
+          <a:p>
+            <a:pPr algn="l">
+              <a:spcAft>
+                <a:spcPts val="1000"/>
+              </a:spcAft>
+            </a:pPr>
+            <a:r>
+              <a:rPr sz="1700" b="0">
+                <a:solidFill>
+                  <a:srgbClr val="222222"/>
+                </a:solidFill>
+                <a:latin typeface="맑은 고딕"/>
+              </a:rPr>
+              <a:t>•  `connected to target database: **CHICAGO**` — DB_NAME 이다</a:t>
+            </a:r>
+          </a:p>
+          <a:p>
+            <a:pPr algn="l">
+              <a:spcAft>
+                <a:spcPts val="1000"/>
+              </a:spcAft>
+            </a:pPr>
+            <a:r>
+              <a:rPr sz="1700" b="0">
+                <a:solidFill>
+                  <a:srgbClr val="222222"/>
+                </a:solidFill>
+                <a:latin typeface="맑은 고딕"/>
+              </a:rPr>
+              <a:t>•  실측 **2,820MB → 550MB, 57초**</a:t>
+            </a:r>
+          </a:p>
+          <a:p>
+            <a:pPr algn="l">
+              <a:spcAft>
+                <a:spcPts val="1000"/>
+              </a:spcAft>
+            </a:pPr>
+            <a:r>
+              <a:rPr sz="1700" b="0">
+                <a:solidFill>
+                  <a:srgbClr val="222222"/>
+                </a:solidFill>
+                <a:latin typeface="맑은 고딕"/>
+              </a:rPr>
+              <a:t>•  아카이브까지 받으면 **`RMAN-06820`** 경고</a:t>
+            </a:r>
+          </a:p>
+        </p:txBody>
+      </p:sp>
+    </p:spTree>
+  </p:cSld>
+  <p:clrMapOvr>
+    <a:masterClrMapping/>
+  </p:clrMapOvr>
+</p:sld>
+</file>
+
+<file path=ppt/slides/slide42.xml><?xml version="1.0" encoding="utf-8"?>
+<p:sld xmlns:a="http://schemas.openxmlformats.org/drawingml/2006/main" xmlns:p="http://schemas.openxmlformats.org/presentationml/2006/main" xmlns:r="http://schemas.openxmlformats.org/officeDocument/2006/relationships">
+  <p:cSld>
+    <p:spTree>
+      <p:nvGrpSpPr>
+        <p:cNvPr id="1" name=""/>
+        <p:cNvGrpSpPr/>
+        <p:nvPr/>
+      </p:nvGrpSpPr>
+      <p:grpSpPr/>
+      <p:sp>
+        <p:nvSpPr>
+          <p:cNvPr id="2" name="Rectangle 1"/>
+          <p:cNvSpPr/>
+          <p:nvPr/>
+        </p:nvSpPr>
+        <p:spPr>
+          <a:xfrm>
+            <a:off x="0" y="0"/>
+            <a:ext cx="12191695" cy="1005840"/>
+          </a:xfrm>
+          <a:prstGeom prst="rect">
+            <a:avLst/>
+          </a:prstGeom>
+          <a:solidFill>
+            <a:srgbClr val="C0392B"/>
+          </a:solidFill>
+          <a:ln>
+            <a:noFill/>
+          </a:ln>
+          <a:effectLst/>
+        </p:spPr>
+        <p:style>
+          <a:lnRef idx="1">
+            <a:schemeClr val="accent1"/>
+          </a:lnRef>
+          <a:fillRef idx="3">
+            <a:schemeClr val="accent1"/>
+          </a:fillRef>
+          <a:effectRef idx="2">
+            <a:schemeClr val="accent1"/>
+          </a:effectRef>
+          <a:fontRef idx="minor">
+            <a:schemeClr val="lt1"/>
+          </a:fontRef>
+        </p:style>
+        <p:txBody>
+          <a:bodyPr rtlCol="0" anchor="ctr"/>
+          <a:lstStyle/>
+          <a:p>
+            <a:pPr algn="ctr"/>
+          </a:p>
+        </p:txBody>
+      </p:sp>
+      <p:sp>
+        <p:nvSpPr>
+          <p:cNvPr id="3" name="TextBox 2"/>
+          <p:cNvSpPr txBox="1"/>
+          <p:nvPr/>
+        </p:nvSpPr>
+        <p:spPr>
+          <a:xfrm>
+            <a:off x="548640" y="91440"/>
+            <a:ext cx="10972800" cy="777240"/>
+          </a:xfrm>
+          <a:prstGeom prst="rect">
+            <a:avLst/>
+          </a:prstGeom>
+          <a:noFill/>
+        </p:spPr>
+        <p:txBody>
+          <a:bodyPr wrap="square">
+            <a:spAutoFit/>
+          </a:bodyPr>
+          <a:lstStyle/>
+          <a:p>
+            <a:pPr algn="l">
+              <a:spcAft>
+                <a:spcPts val="600"/>
+              </a:spcAft>
+            </a:pPr>
+            <a:r>
+              <a:rPr sz="2600" b="1">
+                <a:solidFill>
+                  <a:srgbClr val="FFFFFF"/>
+                </a:solidFill>
+                <a:latin typeface="맑은 고딕"/>
+              </a:rPr>
+              <a:t>그런데 Primary 에서는 안 보인다</a:t>
+            </a:r>
+          </a:p>
+        </p:txBody>
+      </p:sp>
+      <p:sp>
+        <p:nvSpPr>
+          <p:cNvPr id="4" name="TextBox 3"/>
+          <p:cNvSpPr txBox="1"/>
+          <p:nvPr/>
+        </p:nvSpPr>
+        <p:spPr>
+          <a:xfrm>
+            <a:off x="640080" y="1078992"/>
+            <a:ext cx="10881360" cy="457200"/>
+          </a:xfrm>
+          <a:prstGeom prst="rect">
+            <a:avLst/>
+          </a:prstGeom>
+          <a:noFill/>
+        </p:spPr>
+        <p:txBody>
+          <a:bodyPr wrap="square">
+            <a:spAutoFit/>
+          </a:bodyPr>
+          <a:lstStyle/>
+          <a:p>
+            <a:pPr algn="l">
+              <a:spcAft>
+                <a:spcPts val="600"/>
+              </a:spcAft>
+            </a:pPr>
+            <a:r>
+              <a:rPr sz="1500" b="0">
+                <a:solidFill>
+                  <a:srgbClr val="5A6672"/>
+                </a:solidFill>
+                <a:latin typeface="맑은 고딕"/>
+              </a:rPr>
+              <a:t>절반만 맞다</a:t>
+            </a:r>
+          </a:p>
+        </p:txBody>
+      </p:sp>
+      <p:sp>
+        <p:nvSpPr>
+          <p:cNvPr id="5" name="TextBox 4"/>
+          <p:cNvSpPr txBox="1"/>
+          <p:nvPr/>
+        </p:nvSpPr>
+        <p:spPr>
+          <a:xfrm>
+            <a:off x="640080" y="1737360"/>
+            <a:ext cx="10881360" cy="4754880"/>
+          </a:xfrm>
+          <a:prstGeom prst="rect">
+            <a:avLst/>
+          </a:prstGeom>
+          <a:noFill/>
+        </p:spPr>
+        <p:txBody>
+          <a:bodyPr wrap="square">
+            <a:spAutoFit/>
+          </a:bodyPr>
+          <a:lstStyle/>
+          <a:p>
+            <a:pPr algn="l">
+              <a:spcAft>
+                <a:spcPts val="1000"/>
+              </a:spcAft>
+            </a:pPr>
+            <a:r>
+              <a:rPr sz="1700" b="0">
+                <a:solidFill>
+                  <a:srgbClr val="222222"/>
+                </a:solidFill>
+                <a:latin typeface="맑은 고딕"/>
+              </a:rPr>
+              <a:t>•  boston `list backup summary` → **11건**</a:t>
+            </a:r>
+          </a:p>
+          <a:p>
+            <a:pPr algn="l">
+              <a:spcAft>
+                <a:spcPts val="1000"/>
+              </a:spcAft>
+            </a:pPr>
+            <a:r>
+              <a:rPr sz="1700" b="0">
+                <a:solidFill>
+                  <a:srgbClr val="222222"/>
+                </a:solidFill>
+                <a:latin typeface="맑은 고딕"/>
+              </a:rPr>
+              <a:t>•  chicago `list backup summary` → **2건**</a:t>
+            </a:r>
+          </a:p>
+          <a:p>
+            <a:pPr algn="l">
+              <a:spcAft>
+                <a:spcPts val="1000"/>
+              </a:spcAft>
+            </a:pPr>
+            <a:r>
+              <a:rPr sz="1700" b="0">
+                <a:solidFill>
+                  <a:srgbClr val="222222"/>
+                </a:solidFill>
+                <a:latin typeface="맑은 고딕"/>
+              </a:rPr>
+              <a:t>•  `V$RMAN_BACKUP_JOB_DETAILS` → **`no rows selected`**</a:t>
+            </a:r>
+          </a:p>
+          <a:p>
+            <a:pPr algn="l">
+              <a:spcAft>
+                <a:spcPts val="1000"/>
+              </a:spcAft>
+            </a:pPr>
+            <a:r>
+              <a:rPr sz="1700" b="0">
+                <a:solidFill>
+                  <a:srgbClr val="222222"/>
+                </a:solidFill>
+                <a:latin typeface="맑은 고딕"/>
+              </a:rPr>
+              <a:t>•  백업 이력은 **받은 쪽 컨트롤 파일에만** 있다</a:t>
+            </a:r>
+          </a:p>
+        </p:txBody>
+      </p:sp>
+    </p:spTree>
+  </p:cSld>
+  <p:clrMapOvr>
+    <a:masterClrMapping/>
+  </p:clrMapOvr>
+</p:sld>
+</file>
+
+<file path=ppt/slides/slide43.xml><?xml version="1.0" encoding="utf-8"?>
+<p:sld xmlns:a="http://schemas.openxmlformats.org/drawingml/2006/main" xmlns:p="http://schemas.openxmlformats.org/presentationml/2006/main" xmlns:r="http://schemas.openxmlformats.org/officeDocument/2006/relationships">
+  <p:cSld>
+    <p:spTree>
+      <p:nvGrpSpPr>
+        <p:cNvPr id="1" name=""/>
+        <p:cNvGrpSpPr/>
+        <p:nvPr/>
+      </p:nvGrpSpPr>
+      <p:grpSpPr/>
+      <p:sp>
+        <p:nvSpPr>
+          <p:cNvPr id="2" name="Rectangle 1"/>
+          <p:cNvSpPr/>
+          <p:nvPr/>
+        </p:nvSpPr>
+        <p:spPr>
+          <a:xfrm>
+            <a:off x="0" y="0"/>
+            <a:ext cx="12191695" cy="1005840"/>
+          </a:xfrm>
+          <a:prstGeom prst="rect">
+            <a:avLst/>
+          </a:prstGeom>
+          <a:solidFill>
+            <a:srgbClr val="C0392B"/>
+          </a:solidFill>
+          <a:ln>
+            <a:noFill/>
+          </a:ln>
+          <a:effectLst/>
+        </p:spPr>
+        <p:style>
+          <a:lnRef idx="1">
+            <a:schemeClr val="accent1"/>
+          </a:lnRef>
+          <a:fillRef idx="3">
+            <a:schemeClr val="accent1"/>
+          </a:fillRef>
+          <a:effectRef idx="2">
+            <a:schemeClr val="accent1"/>
+          </a:effectRef>
+          <a:fontRef idx="minor">
+            <a:schemeClr val="lt1"/>
+          </a:fontRef>
+        </p:style>
+        <p:txBody>
+          <a:bodyPr rtlCol="0" anchor="ctr"/>
+          <a:lstStyle/>
+          <a:p>
+            <a:pPr algn="ctr"/>
+          </a:p>
+        </p:txBody>
+      </p:sp>
+      <p:sp>
+        <p:nvSpPr>
+          <p:cNvPr id="3" name="TextBox 2"/>
+          <p:cNvSpPr txBox="1"/>
+          <p:nvPr/>
+        </p:nvSpPr>
+        <p:spPr>
+          <a:xfrm>
+            <a:off x="548640" y="91440"/>
+            <a:ext cx="10972800" cy="777240"/>
+          </a:xfrm>
+          <a:prstGeom prst="rect">
+            <a:avLst/>
+          </a:prstGeom>
+          <a:noFill/>
+        </p:spPr>
+        <p:txBody>
+          <a:bodyPr wrap="square">
+            <a:spAutoFit/>
+          </a:bodyPr>
+          <a:lstStyle/>
+          <a:p>
+            <a:pPr algn="l">
+              <a:spcAft>
+                <a:spcPts val="600"/>
+              </a:spcAft>
+            </a:pPr>
+            <a:r>
+              <a:rPr sz="2600" b="1">
+                <a:solidFill>
+                  <a:srgbClr val="FFFFFF"/>
+                </a:solidFill>
+                <a:latin typeface="맑은 고딕"/>
+              </a:rPr>
+              <a:t>두 가지 조치</a:t>
+            </a:r>
+          </a:p>
+        </p:txBody>
+      </p:sp>
+      <p:sp>
+        <p:nvSpPr>
+          <p:cNvPr id="4" name="TextBox 3"/>
+          <p:cNvSpPr txBox="1"/>
+          <p:nvPr/>
+        </p:nvSpPr>
+        <p:spPr>
+          <a:xfrm>
+            <a:off x="640080" y="1078992"/>
+            <a:ext cx="10881360" cy="457200"/>
+          </a:xfrm>
+          <a:prstGeom prst="rect">
+            <a:avLst/>
+          </a:prstGeom>
+          <a:noFill/>
+        </p:spPr>
+        <p:txBody>
+          <a:bodyPr wrap="square">
+            <a:spAutoFit/>
+          </a:bodyPr>
+          <a:lstStyle/>
+          <a:p>
+            <a:pPr algn="l">
+              <a:spcAft>
+                <a:spcPts val="600"/>
+              </a:spcAft>
+            </a:pPr>
+            <a:r>
+              <a:rPr sz="1500" b="0">
+                <a:solidFill>
+                  <a:srgbClr val="5A6672"/>
+                </a:solidFill>
+                <a:latin typeface="맑은 고딕"/>
+              </a:rPr>
+              <a:t>카탈로그와 CATALOG</a:t>
+            </a:r>
+          </a:p>
+        </p:txBody>
+      </p:sp>
+      <p:sp>
+        <p:nvSpPr>
+          <p:cNvPr id="5" name="TextBox 4"/>
+          <p:cNvSpPr txBox="1"/>
+          <p:nvPr/>
+        </p:nvSpPr>
+        <p:spPr>
+          <a:xfrm>
+            <a:off x="640080" y="1737360"/>
+            <a:ext cx="10881360" cy="4754880"/>
+          </a:xfrm>
+          <a:prstGeom prst="rect">
+            <a:avLst/>
+          </a:prstGeom>
+          <a:noFill/>
+        </p:spPr>
+        <p:txBody>
+          <a:bodyPr wrap="square">
+            <a:spAutoFit/>
+          </a:bodyPr>
+          <a:lstStyle/>
+          <a:p>
+            <a:pPr algn="l">
+              <a:spcAft>
+                <a:spcPts val="1000"/>
+              </a:spcAft>
+            </a:pPr>
+            <a:r>
+              <a:rPr sz="1700" b="0">
+                <a:solidFill>
+                  <a:srgbClr val="222222"/>
+                </a:solidFill>
+                <a:latin typeface="맑은 고딕"/>
+              </a:rPr>
+              <a:t>•  **① 복구 카탈로그** — `configure db_unique_name 'boston' ...`</a:t>
+            </a:r>
+          </a:p>
+          <a:p>
+            <a:pPr algn="l">
+              <a:spcAft>
+                <a:spcPts val="1000"/>
+              </a:spcAft>
+            </a:pPr>
+            <a:r>
+              <a:rPr sz="1700" b="0">
+                <a:solidFill>
+                  <a:srgbClr val="222222"/>
+                </a:solidFill>
+                <a:latin typeface="맑은 고딕"/>
+              </a:rPr>
+              <a:t>•  **② 조각을 옮기고 등록** — `catalog start with '...' noprompt`</a:t>
+            </a:r>
+          </a:p>
+          <a:p>
+            <a:pPr algn="l">
+              <a:spcAft>
+                <a:spcPts val="1000"/>
+              </a:spcAft>
+            </a:pPr>
+            <a:r>
+              <a:rPr sz="1700" b="0">
+                <a:solidFill>
+                  <a:srgbClr val="222222"/>
+                </a:solidFill>
+                <a:latin typeface="맑은 고딕"/>
+              </a:rPr>
+              <a:t>•  등록하면 **`.../Chicago/users01.dbf`** 로 인식된다</a:t>
+            </a:r>
+          </a:p>
+          <a:p>
+            <a:pPr algn="l">
+              <a:spcAft>
+                <a:spcPts val="1000"/>
+              </a:spcAft>
+            </a:pPr>
+            <a:r>
+              <a:rPr sz="1700" b="0">
+                <a:solidFill>
+                  <a:srgbClr val="222222"/>
+                </a:solidFill>
+                <a:latin typeface="맑은 고딕"/>
+              </a:rPr>
+              <a:t>•  RMAN 은 이름이 아니라 **DBID + 파일 번호**로 판단한다</a:t>
+            </a:r>
+          </a:p>
+        </p:txBody>
+      </p:sp>
+    </p:spTree>
+  </p:cSld>
+  <p:clrMapOvr>
+    <a:masterClrMapping/>
+  </p:clrMapOvr>
+</p:sld>
+</file>
+
+<file path=ppt/slides/slide44.xml><?xml version="1.0" encoding="utf-8"?>
+<p:sld xmlns:a="http://schemas.openxmlformats.org/drawingml/2006/main" xmlns:p="http://schemas.openxmlformats.org/presentationml/2006/main" xmlns:r="http://schemas.openxmlformats.org/officeDocument/2006/relationships">
+  <p:cSld>
+    <p:spTree>
+      <p:nvGrpSpPr>
+        <p:cNvPr id="1" name=""/>
+        <p:cNvGrpSpPr/>
+        <p:nvPr/>
+      </p:nvGrpSpPr>
+      <p:grpSpPr/>
+      <p:sp>
+        <p:nvSpPr>
+          <p:cNvPr id="2" name="Rectangle 1"/>
+          <p:cNvSpPr/>
+          <p:nvPr/>
+        </p:nvSpPr>
+        <p:spPr>
+          <a:xfrm>
+            <a:off x="0" y="0"/>
+            <a:ext cx="12191695" cy="1005840"/>
+          </a:xfrm>
+          <a:prstGeom prst="rect">
+            <a:avLst/>
+          </a:prstGeom>
+          <a:solidFill>
+            <a:srgbClr val="C0392B"/>
+          </a:solidFill>
+          <a:ln>
+            <a:noFill/>
+          </a:ln>
+          <a:effectLst/>
+        </p:spPr>
+        <p:style>
+          <a:lnRef idx="1">
+            <a:schemeClr val="accent1"/>
+          </a:lnRef>
+          <a:fillRef idx="3">
+            <a:schemeClr val="accent1"/>
+          </a:fillRef>
+          <a:effectRef idx="2">
+            <a:schemeClr val="accent1"/>
+          </a:effectRef>
+          <a:fontRef idx="minor">
+            <a:schemeClr val="lt1"/>
+          </a:fontRef>
+        </p:style>
+        <p:txBody>
+          <a:bodyPr rtlCol="0" anchor="ctr"/>
+          <a:lstStyle/>
+          <a:p>
+            <a:pPr algn="ctr"/>
+          </a:p>
+        </p:txBody>
+      </p:sp>
+      <p:sp>
+        <p:nvSpPr>
+          <p:cNvPr id="3" name="TextBox 2"/>
+          <p:cNvSpPr txBox="1"/>
+          <p:nvPr/>
+        </p:nvSpPr>
+        <p:spPr>
+          <a:xfrm>
+            <a:off x="548640" y="91440"/>
+            <a:ext cx="10972800" cy="777240"/>
+          </a:xfrm>
+          <a:prstGeom prst="rect">
+            <a:avLst/>
+          </a:prstGeom>
+          <a:noFill/>
+        </p:spPr>
+        <p:txBody>
+          <a:bodyPr wrap="square">
+            <a:spAutoFit/>
+          </a:bodyPr>
+          <a:lstStyle/>
+          <a:p>
+            <a:pPr algn="l">
+              <a:spcAft>
+                <a:spcPts val="600"/>
+              </a:spcAft>
+            </a:pPr>
+            <a:r>
+              <a:rPr sz="2600" b="1">
+                <a:solidFill>
+                  <a:srgbClr val="FFFFFF"/>
+                </a:solidFill>
+                <a:latin typeface="맑은 고딕"/>
+              </a:rPr>
+              <a:t>요약</a:t>
+            </a:r>
+          </a:p>
+        </p:txBody>
+      </p:sp>
+      <p:sp>
+        <p:nvSpPr>
+          <p:cNvPr id="4" name="TextBox 3"/>
+          <p:cNvSpPr txBox="1"/>
+          <p:nvPr/>
+        </p:nvSpPr>
+        <p:spPr>
+          <a:xfrm>
+            <a:off x="640080" y="1371600"/>
+            <a:ext cx="10881360" cy="5120640"/>
+          </a:xfrm>
+          <a:prstGeom prst="rect">
+            <a:avLst/>
+          </a:prstGeom>
+          <a:noFill/>
+        </p:spPr>
+        <p:txBody>
+          <a:bodyPr wrap="square">
+            <a:spAutoFit/>
+          </a:bodyPr>
+          <a:lstStyle/>
+          <a:p>
+            <a:pPr algn="l">
+              <a:spcAft>
+                <a:spcPts val="1000"/>
+              </a:spcAft>
+            </a:pPr>
+            <a:r>
+              <a:rPr sz="1600" b="0">
+                <a:solidFill>
+                  <a:srgbClr val="222222"/>
+                </a:solidFill>
+                <a:latin typeface="맑은 고딕"/>
+              </a:rPr>
+              <a:t>•  Switchover 는 **무손실·되돌림 가능**, Failover 는 **손실 가능·Reinstate 필요**</a:t>
+            </a:r>
+          </a:p>
+          <a:p>
+            <a:pPr algn="l">
+              <a:spcAft>
+                <a:spcPts val="1000"/>
+              </a:spcAft>
+            </a:pPr>
+            <a:r>
+              <a:rPr sz="1600" b="0">
+                <a:solidFill>
+                  <a:srgbClr val="222222"/>
+                </a:solidFill>
+                <a:latin typeface="맑은 고딕"/>
+              </a:rPr>
+              <a:t>•  `SWITCHOVER_STATUS` — Primary `TO STANDBY`, Standby `NOT ALLOWED`(정상)</a:t>
+            </a:r>
+          </a:p>
+          <a:p>
+            <a:pPr algn="l">
+              <a:spcAft>
+                <a:spcPts val="1000"/>
+              </a:spcAft>
+            </a:pPr>
+            <a:r>
+              <a:rPr sz="1600" b="0">
+                <a:solidFill>
+                  <a:srgbClr val="222222"/>
+                </a:solidFill>
+                <a:latin typeface="맑은 고딕"/>
+              </a:rPr>
+              <a:t>•  `Connected to an idle instance.` — **정적 등록이 여기서 쓰인다**</a:t>
+            </a:r>
+          </a:p>
+          <a:p>
+            <a:pPr algn="l">
+              <a:spcAft>
+                <a:spcPts val="1000"/>
+              </a:spcAft>
+            </a:pPr>
+            <a:r>
+              <a:rPr sz="1600" b="0">
+                <a:solidFill>
+                  <a:srgbClr val="222222"/>
+                </a:solidFill>
+                <a:latin typeface="맑은 고딕"/>
+              </a:rPr>
+              <a:t>•  `Database opened.` — **Active Data Guard 가 전환 후에도 유지**</a:t>
+            </a:r>
+          </a:p>
+          <a:p>
+            <a:pPr algn="l">
+              <a:spcAft>
+                <a:spcPts val="1000"/>
+              </a:spcAft>
+            </a:pPr>
+            <a:r>
+              <a:rPr sz="1600" b="0">
+                <a:solidFill>
+                  <a:srgbClr val="222222"/>
+                </a:solidFill>
+                <a:latin typeface="맑은 고딕"/>
+              </a:rPr>
+              <a:t>•  `DB_NAME` 은 양쪽 `CHICAGO`. 구별은 **`DB_UNIQUE_NAME`**</a:t>
+            </a:r>
+          </a:p>
+          <a:p>
+            <a:pPr algn="l">
+              <a:spcAft>
+                <a:spcPts val="1000"/>
+              </a:spcAft>
+            </a:pPr>
+            <a:r>
+              <a:rPr sz="1600" b="0">
+                <a:solidFill>
+                  <a:srgbClr val="222222"/>
+                </a:solidFill>
+                <a:latin typeface="맑은 고딕"/>
+              </a:rPr>
+              <a:t>•  전환하면 Broker 가 목적지를 **반대 방향으로 다시 쓴다**</a:t>
+            </a:r>
+          </a:p>
+          <a:p>
+            <a:pPr algn="l">
+              <a:spcAft>
+                <a:spcPts val="1000"/>
+              </a:spcAft>
+            </a:pPr>
+            <a:r>
+              <a:rPr sz="1600" b="0">
+                <a:solidFill>
+                  <a:srgbClr val="222222"/>
+                </a:solidFill>
+                <a:latin typeface="맑은 고딕"/>
+              </a:rPr>
+              <a:t>•  없는 멤버는 문장, 자기 자신은 **ORA-16558**</a:t>
+            </a:r>
+          </a:p>
+          <a:p>
+            <a:pPr algn="l">
+              <a:spcAft>
+                <a:spcPts val="1000"/>
+              </a:spcAft>
+            </a:pPr>
+            <a:r>
+              <a:rPr sz="1600" b="0">
+                <a:solidFill>
+                  <a:srgbClr val="222222"/>
+                </a:solidFill>
+                <a:latin typeface="맑은 고딕"/>
+              </a:rPr>
+              <a:t>•  **★ SQL 전환은 거부되지 않는다.** 역할만 바뀌고 뒷정리가 없다</a:t>
+            </a:r>
+          </a:p>
+          <a:p>
+            <a:pPr algn="l">
+              <a:spcAft>
+                <a:spcPts val="1000"/>
+              </a:spcAft>
+            </a:pPr>
+            <a:r>
+              <a:rPr sz="1600" b="0">
+                <a:solidFill>
+                  <a:srgbClr val="222222"/>
+                </a:solidFill>
+                <a:latin typeface="맑은 고딕"/>
+              </a:rPr>
+              <a:t>•  그 결과 **ORA-16816**, 복구는 `REMOVE`→`CREATE`→`ADD`→`ENABLE`</a:t>
+            </a:r>
+          </a:p>
+          <a:p>
+            <a:pPr algn="l">
+              <a:spcAft>
+                <a:spcPts val="1000"/>
+              </a:spcAft>
+            </a:pPr>
+            <a:r>
+              <a:rPr sz="1600" b="0">
+                <a:solidFill>
+                  <a:srgbClr val="222222"/>
+                </a:solidFill>
+                <a:latin typeface="맑은 고딕"/>
+              </a:rPr>
+              <a:t>•  플래시백은 열린 채로 켜진다. 이미 켜졌으면 **ORA-38706+38713**</a:t>
+            </a:r>
+          </a:p>
+          <a:p>
+            <a:pPr algn="l">
+              <a:spcAft>
+                <a:spcPts val="1000"/>
+              </a:spcAft>
+            </a:pPr>
+            <a:r>
+              <a:rPr sz="1600" b="0">
+                <a:solidFill>
+                  <a:srgbClr val="222222"/>
+                </a:solidFill>
+                <a:latin typeface="맑은 고딕"/>
+              </a:rPr>
+              <a:t>•  Standby 는 **`Possible network disconnect`** 라고만 말한다 (`ERROR_CODE` 0)</a:t>
+            </a:r>
+          </a:p>
+          <a:p>
+            <a:pPr algn="l">
+              <a:spcAft>
+                <a:spcPts val="1000"/>
+              </a:spcAft>
+            </a:pPr>
+            <a:r>
+              <a:rPr sz="1600" b="0">
+                <a:solidFill>
+                  <a:srgbClr val="222222"/>
+                </a:solidFill>
+                <a:latin typeface="맑은 고딕"/>
+              </a:rPr>
+              <a:t>•  Failover 직후 `(disabled)` + **ORA-16661** 인데 상태는 **`SUCCESS`**</a:t>
+            </a:r>
+          </a:p>
+          <a:p>
+            <a:pPr algn="l">
+              <a:spcAft>
+                <a:spcPts val="1000"/>
+              </a:spcAft>
+            </a:pPr>
+            <a:r>
+              <a:rPr sz="1600" b="0">
+                <a:solidFill>
+                  <a:srgbClr val="222222"/>
+                </a:solidFill>
+                <a:latin typeface="맑은 고딕"/>
+              </a:rPr>
+              <a:t>•  내려간 채로 Reinstate → **ORA-16653**. `MOUNT` 까지만 올린다</a:t>
+            </a:r>
+          </a:p>
+          <a:p>
+            <a:pPr algn="l">
+              <a:spcAft>
+                <a:spcPts val="1000"/>
+              </a:spcAft>
+            </a:pPr>
+            <a:r>
+              <a:rPr sz="1600" b="0">
+                <a:solidFill>
+                  <a:srgbClr val="222222"/>
+                </a:solidFill>
+                <a:latin typeface="맑은 고딕"/>
+              </a:rPr>
+              <a:t>•  Failover 는 `OPEN RESETLOGS` — 시퀀스가 **4로 다시 시작**</a:t>
+            </a:r>
+          </a:p>
+          <a:p>
+            <a:pPr algn="l">
+              <a:spcAft>
+                <a:spcPts val="1000"/>
+              </a:spcAft>
+            </a:pPr>
+            <a:r>
+              <a:rPr sz="1600" b="0">
+                <a:solidFill>
+                  <a:srgbClr val="222222"/>
+                </a:solidFill>
+                <a:latin typeface="맑은 고딕"/>
+              </a:rPr>
+              <a:t>•  전환 직후의 `ORA-16786`·`ORA-16854` 는 **판정 시차**</a:t>
+            </a:r>
+          </a:p>
+          <a:p>
+            <a:pPr algn="l">
+              <a:spcAft>
+                <a:spcPts val="1000"/>
+              </a:spcAft>
+            </a:pPr>
+            <a:r>
+              <a:rPr sz="1600" b="0">
+                <a:solidFill>
+                  <a:srgbClr val="222222"/>
+                </a:solidFill>
+                <a:latin typeface="맑은 고딕"/>
+              </a:rPr>
+              <a:t>•  관측자는 제3 호스트에서 돈다. 자동 전환 **69초**, 자동 재편입 **42초**</a:t>
+            </a:r>
+          </a:p>
+          <a:p>
+            <a:pPr algn="l">
+              <a:spcAft>
+                <a:spcPts val="1000"/>
+              </a:spcAft>
+            </a:pPr>
+            <a:r>
+              <a:rPr sz="1600" b="0">
+                <a:solidFill>
+                  <a:srgbClr val="222222"/>
+                </a:solidFill>
+                <a:latin typeface="맑은 고딕"/>
+              </a:rPr>
+              <a:t>•  관측자는 **"Standby 가 방금까지 Primary 와 연락했다"면 한 번 거부**한다</a:t>
+            </a:r>
+          </a:p>
+          <a:p>
+            <a:pPr algn="l">
+              <a:spcAft>
+                <a:spcPts val="1000"/>
+              </a:spcAft>
+            </a:pPr>
+            <a:r>
+              <a:rPr sz="1600" b="0">
+                <a:solidFill>
+                  <a:srgbClr val="222222"/>
+                </a:solidFill>
+                <a:latin typeface="맑은 고딕"/>
+              </a:rPr>
+              <a:t>•  Standby 백업은 되지만 **Primary 에서는 보이지 않는다** — 카탈로그 또는 `CATALOG`</a:t>
+            </a:r>
+          </a:p>
+        </p:txBody>
+      </p:sp>
+    </p:spTree>
+  </p:cSld>
+  <p:clrMapOvr>
+    <a:masterClrMapping/>
+  </p:clrMapOvr>
+</p:sld>
+</file>
+
+<file path=ppt/slides/slide45.xml><?xml version="1.0" encoding="utf-8"?>
+<p:sld xmlns:a="http://schemas.openxmlformats.org/drawingml/2006/main" xmlns:p="http://schemas.openxmlformats.org/presentationml/2006/main" xmlns:r="http://schemas.openxmlformats.org/officeDocument/2006/relationships">
+  <p:cSld>
+    <p:spTree>
+      <p:nvGrpSpPr>
+        <p:cNvPr id="1" name=""/>
+        <p:cNvGrpSpPr/>
+        <p:nvPr/>
+      </p:nvGrpSpPr>
+      <p:grpSpPr/>
+      <p:sp>
+        <p:nvSpPr>
+          <p:cNvPr id="2" name="Rectangle 1"/>
+          <p:cNvSpPr/>
+          <p:nvPr/>
+        </p:nvSpPr>
+        <p:spPr>
+          <a:xfrm>
+            <a:off x="0" y="0"/>
+            <a:ext cx="12191695" cy="1005840"/>
+          </a:xfrm>
+          <a:prstGeom prst="rect">
+            <a:avLst/>
+          </a:prstGeom>
+          <a:solidFill>
+            <a:srgbClr val="C0392B"/>
+          </a:solidFill>
+          <a:ln>
+            <a:noFill/>
+          </a:ln>
+          <a:effectLst/>
+        </p:spPr>
+        <p:style>
+          <a:lnRef idx="1">
+            <a:schemeClr val="accent1"/>
+          </a:lnRef>
+          <a:fillRef idx="3">
+            <a:schemeClr val="accent1"/>
+          </a:fillRef>
+          <a:effectRef idx="2">
+            <a:schemeClr val="accent1"/>
+          </a:effectRef>
+          <a:fontRef idx="minor">
+            <a:schemeClr val="lt1"/>
+          </a:fontRef>
+        </p:style>
+        <p:txBody>
+          <a:bodyPr rtlCol="0" anchor="ctr"/>
+          <a:lstStyle/>
+          <a:p>
+            <a:pPr algn="ctr"/>
+          </a:p>
+        </p:txBody>
+      </p:sp>
+      <p:sp>
+        <p:nvSpPr>
+          <p:cNvPr id="3" name="TextBox 2"/>
+          <p:cNvSpPr txBox="1"/>
+          <p:nvPr/>
+        </p:nvSpPr>
+        <p:spPr>
+          <a:xfrm>
+            <a:off x="548640" y="91440"/>
+            <a:ext cx="10972800" cy="777240"/>
+          </a:xfrm>
+          <a:prstGeom prst="rect">
+            <a:avLst/>
+          </a:prstGeom>
+          <a:noFill/>
+        </p:spPr>
+        <p:txBody>
+          <a:bodyPr wrap="square">
+            <a:spAutoFit/>
+          </a:bodyPr>
+          <a:lstStyle/>
+          <a:p>
+            <a:pPr algn="l">
+              <a:spcAft>
+                <a:spcPts val="600"/>
+              </a:spcAft>
+            </a:pPr>
+            <a:r>
+              <a:rPr sz="2600" b="1">
+                <a:solidFill>
+                  <a:srgbClr val="FFFFFF"/>
+                </a:solidFill>
+                <a:latin typeface="맑은 고딕"/>
+              </a:rPr>
+              <a:t>과정을 닫으며</a:t>
+            </a:r>
+          </a:p>
+        </p:txBody>
+      </p:sp>
+      <p:sp>
+        <p:nvSpPr>
+          <p:cNvPr id="4" name="TextBox 3"/>
+          <p:cNvSpPr txBox="1"/>
+          <p:nvPr/>
+        </p:nvSpPr>
+        <p:spPr>
+          <a:xfrm>
+            <a:off x="640080" y="1371600"/>
+            <a:ext cx="10881360" cy="5120640"/>
+          </a:xfrm>
+          <a:prstGeom prst="rect">
+            <a:avLst/>
+          </a:prstGeom>
+          <a:noFill/>
+        </p:spPr>
+        <p:txBody>
+          <a:bodyPr wrap="square">
+            <a:spAutoFit/>
+          </a:bodyPr>
+          <a:lstStyle/>
+          <a:p>
+            <a:pPr algn="l">
+              <a:spcAft>
+                <a:spcPts val="1000"/>
+              </a:spcAft>
+            </a:pPr>
+            <a:r>
+              <a:rPr sz="1600" b="0">
+                <a:solidFill>
+                  <a:srgbClr val="222222"/>
+                </a:solidFill>
+                <a:latin typeface="맑은 고딕"/>
+              </a:rPr>
+              <a:t>•  1장에서 시작해 16장에서 실제로 역할을 바꿨다</a:t>
+            </a:r>
+          </a:p>
+          <a:p>
+            <a:pPr algn="l">
+              <a:spcAft>
+                <a:spcPts val="1000"/>
+              </a:spcAft>
+            </a:pPr>
+            <a:r>
+              <a:rPr sz="1600" b="0">
+                <a:solidFill>
+                  <a:srgbClr val="222222"/>
+                </a:solidFill>
+                <a:latin typeface="맑은 고딕"/>
+              </a:rPr>
+              <a:t>•  관통하는 원칙 셋</a:t>
+            </a:r>
+          </a:p>
+          <a:p>
+            <a:pPr algn="l">
+              <a:spcAft>
+                <a:spcPts val="1000"/>
+              </a:spcAft>
+            </a:pPr>
+            <a:r>
+              <a:rPr sz="1600" b="0">
+                <a:solidFill>
+                  <a:srgbClr val="222222"/>
+                </a:solidFill>
+                <a:latin typeface="맑은 고딕"/>
+              </a:rPr>
+              <a:t>•  **① `SUCCESS` 를 안전으로 읽지 않는다** (14~16장에서 네 번)</a:t>
+            </a:r>
+          </a:p>
+          <a:p>
+            <a:pPr algn="l">
+              <a:spcAft>
+                <a:spcPts val="1000"/>
+              </a:spcAft>
+            </a:pPr>
+            <a:r>
+              <a:rPr sz="1600" b="0">
+                <a:solidFill>
+                  <a:srgbClr val="222222"/>
+                </a:solidFill>
+                <a:latin typeface="맑은 고딕"/>
+              </a:rPr>
+              <a:t>•  **② 요약이 아니라 흐름을 본다** (15장의 주 지표)</a:t>
+            </a:r>
+          </a:p>
+          <a:p>
+            <a:pPr algn="l">
+              <a:spcAft>
+                <a:spcPts val="1000"/>
+              </a:spcAft>
+            </a:pPr>
+            <a:r>
+              <a:rPr sz="1600" b="0">
+                <a:solidFill>
+                  <a:srgbClr val="222222"/>
+                </a:solidFill>
+                <a:latin typeface="맑은 고딕"/>
+              </a:rPr>
+              <a:t>•  **③ 전환은 DGMGRL 로만 한다** (16장의 사고)</a:t>
+            </a:r>
+          </a:p>
+          <a:p>
+            <a:pPr algn="l">
+              <a:spcAft>
+                <a:spcPts val="1000"/>
+              </a:spcAft>
+            </a:pPr>
+            <a:r>
+              <a:rPr sz="1600" b="0">
+                <a:solidFill>
+                  <a:srgbClr val="222222"/>
+                </a:solidFill>
+                <a:latin typeface="맑은 고딕"/>
+              </a:rPr>
+              <a:t>•  그리고 — **되돌리는 것까지가 훈련이다**</a:t>
             </a:r>
           </a:p>
         </p:txBody>
